--- a/submission/03_运行与评测包/正式案例_BYZSO冷启动/最终输出/figures/figstudio/fig01_evidence_map/deliverables/fig01_evidence_synthesis_map_editable.pptx
+++ b/submission/03_运行与评测包/正式案例_BYZSO冷启动/最终输出/figures/figstudio/fig01_evidence_map/deliverables/fig01_evidence_synthesis_map_editable.pptx
@@ -7,7 +7,7 @@
   <p:sldIdLst>
     <p:sldId id="256" r:id="rId7"/>
   </p:sldIdLst>
-  <p:sldSz cx="12191999" cy="8127999" type="screen4x3"/>
+  <p:sldSz cx="12191999" cy="6286499" type="screen4x3"/>
   <p:notesSz cx="6858000" cy="9144000"/>
   <p:defaultTextStyle>
     <a:defPPr>
@@ -502,7 +502,7 @@
           <a:lstStyle/>
           <a:p>
             <a:r>
-              <a:t>图 1 不同文献对目标化合物合成研究的适用范围（第五轮 F02 嵌套容器 → super_img2ppt 重建）</a:t>
+              <a:t>图 1 不同文献对目标化合物合成研究的适用范围（第六轮：印刷字号 + 内容定尺寸） [paper=byzso] [print_width_pt=435.2]</a:t>
             </a:r>
           </a:p>
         </p:txBody>
@@ -3524,12 +3524,12 @@
         </p:nvSpPr>
         <p:spPr>
           <a:xfrm>
-            <a:off x="873124" y="396874"/>
-            <a:ext cx="3667124" cy="6397624"/>
+            <a:off x="206374" y="206374"/>
+            <a:ext cx="4254499" cy="5881687"/>
           </a:xfrm>
           <a:prstGeom prst="roundRect">
             <a:avLst>
-              <a:gd name="adj" fmla="val 3030"/>
+              <a:gd name="adj" fmla="val 2611"/>
             </a:avLst>
           </a:prstGeom>
           <a:solidFill>
@@ -3572,8 +3572,8 @@
         </p:nvSpPr>
         <p:spPr>
           <a:xfrm>
-            <a:off x="1015999" y="476249"/>
-            <a:ext cx="1063624" cy="357187"/>
+            <a:off x="349249" y="285749"/>
+            <a:ext cx="1285874" cy="444499"/>
           </a:xfrm>
           <a:prstGeom prst="rect">
             <a:avLst/>
@@ -3589,7 +3589,7 @@
           <a:p>
             <a:pPr algn="l" fontAlgn="base">
               <a:lnSpc>
-                <a:spcPts val="2359"/>
+                <a:spcPts val="3015"/>
               </a:lnSpc>
               <a:spcBef>
                 <a:spcPts val="0"/>
@@ -3597,7 +3597,7 @@
               <a:spcAft>
                 <a:spcPts val="0"/>
               </a:spcAft>
-              <a:defRPr sz="1624" b="1" i="0" lang="zh-CN" dirty="0">
+              <a:defRPr sz="2062" b="1" i="0" lang="zh-CN" dirty="0">
                 <a:solidFill>
                   <a:srgbClr val="2B3E57"/>
                 </a:solidFill>
@@ -3607,7 +3607,7 @@
               </a:defRPr>
             </a:pPr>
             <a:r>
-              <a:rPr sz="1624" b="1" i="0" lang="zh-CN" dirty="0">
+              <a:rPr sz="2062" b="1" i="0" lang="zh-CN" dirty="0">
                 <a:solidFill>
                   <a:srgbClr val="2B3E57"/>
                 </a:solidFill>
@@ -3628,12 +3628,12 @@
         </p:nvSpPr>
         <p:spPr>
           <a:xfrm>
-            <a:off x="4698999" y="396874"/>
-            <a:ext cx="3492499" cy="6397624"/>
+            <a:off x="4651374" y="206374"/>
+            <a:ext cx="3174999" cy="5881687"/>
           </a:xfrm>
           <a:prstGeom prst="roundRect">
             <a:avLst>
-              <a:gd name="adj" fmla="val 3181"/>
+              <a:gd name="adj" fmla="val 3500"/>
             </a:avLst>
           </a:prstGeom>
           <a:solidFill>
@@ -3676,8 +3676,8 @@
         </p:nvSpPr>
         <p:spPr>
           <a:xfrm>
-            <a:off x="4841874" y="476249"/>
-            <a:ext cx="1063624" cy="357187"/>
+            <a:off x="4794249" y="285749"/>
+            <a:ext cx="1285874" cy="444499"/>
           </a:xfrm>
           <a:prstGeom prst="rect">
             <a:avLst/>
@@ -3693,7 +3693,7 @@
           <a:p>
             <a:pPr algn="l" fontAlgn="base">
               <a:lnSpc>
-                <a:spcPts val="2359"/>
+                <a:spcPts val="3015"/>
               </a:lnSpc>
               <a:spcBef>
                 <a:spcPts val="0"/>
@@ -3701,7 +3701,7 @@
               <a:spcAft>
                 <a:spcPts val="0"/>
               </a:spcAft>
-              <a:defRPr sz="1624" b="1" i="0" lang="zh-CN" dirty="0">
+              <a:defRPr sz="2062" b="1" i="0" lang="zh-CN" dirty="0">
                 <a:solidFill>
                   <a:srgbClr val="0F4F58"/>
                 </a:solidFill>
@@ -3711,7 +3711,7 @@
               </a:defRPr>
             </a:pPr>
             <a:r>
-              <a:rPr sz="1624" b="1" i="0" lang="zh-CN" dirty="0">
+              <a:rPr sz="2062" b="1" i="0" lang="zh-CN" dirty="0">
                 <a:solidFill>
                   <a:srgbClr val="0F4F58"/>
                 </a:solidFill>
@@ -3732,12 +3732,12 @@
         </p:nvSpPr>
         <p:spPr>
           <a:xfrm>
-            <a:off x="8350249" y="396874"/>
-            <a:ext cx="3635374" cy="6397624"/>
+            <a:off x="8016874" y="206374"/>
+            <a:ext cx="3968749" cy="5881687"/>
           </a:xfrm>
           <a:prstGeom prst="roundRect">
             <a:avLst>
-              <a:gd name="adj" fmla="val 3056"/>
+              <a:gd name="adj" fmla="val 2800"/>
             </a:avLst>
           </a:prstGeom>
           <a:solidFill>
@@ -3780,8 +3780,8 @@
         </p:nvSpPr>
         <p:spPr>
           <a:xfrm>
-            <a:off x="8493124" y="476249"/>
-            <a:ext cx="1476374" cy="357187"/>
+            <a:off x="8159749" y="285749"/>
+            <a:ext cx="1809749" cy="444499"/>
           </a:xfrm>
           <a:prstGeom prst="rect">
             <a:avLst/>
@@ -3797,7 +3797,7 @@
           <a:p>
             <a:pPr algn="l" fontAlgn="base">
               <a:lnSpc>
-                <a:spcPts val="2359"/>
+                <a:spcPts val="3015"/>
               </a:lnSpc>
               <a:spcBef>
                 <a:spcPts val="0"/>
@@ -3805,7 +3805,7 @@
               <a:spcAft>
                 <a:spcPts val="0"/>
               </a:spcAft>
-              <a:defRPr sz="1624" b="1" i="0" lang="zh-CN" dirty="0">
+              <a:defRPr sz="2062" b="1" i="0" lang="zh-CN" dirty="0">
                 <a:solidFill>
                   <a:srgbClr val="7A5410"/>
                 </a:solidFill>
@@ -3815,7 +3815,7 @@
               </a:defRPr>
             </a:pPr>
             <a:r>
-              <a:rPr sz="1624" b="1" i="0" lang="zh-CN" dirty="0">
+              <a:rPr sz="2062" b="1" i="0" lang="zh-CN" dirty="0">
                 <a:solidFill>
                   <a:srgbClr val="7A5410"/>
                 </a:solidFill>
@@ -3836,12 +3836,12 @@
         </p:nvSpPr>
         <p:spPr>
           <a:xfrm>
-            <a:off x="1031874" y="1190624"/>
-            <a:ext cx="3333749" cy="809624"/>
+            <a:off x="777874" y="809624"/>
+            <a:ext cx="3555999" cy="857249"/>
           </a:xfrm>
           <a:prstGeom prst="roundRect">
             <a:avLst>
-              <a:gd name="adj" fmla="val 8823"/>
+              <a:gd name="adj" fmla="val 8333"/>
             </a:avLst>
           </a:prstGeom>
           <a:solidFill>
@@ -3884,12 +3884,12 @@
         </p:nvSpPr>
         <p:spPr>
           <a:xfrm>
-            <a:off x="1031874" y="1190624"/>
-            <a:ext cx="63499" cy="809624"/>
+            <a:off x="777874" y="809624"/>
+            <a:ext cx="47624" cy="857249"/>
           </a:xfrm>
           <a:prstGeom prst="roundRect">
             <a:avLst>
-              <a:gd name="adj" fmla="val 37500"/>
+              <a:gd name="adj" fmla="val 50000"/>
             </a:avLst>
           </a:prstGeom>
           <a:solidFill>
@@ -3930,7 +3930,7 @@
         </p:nvSpPr>
         <p:spPr>
           <a:xfrm>
-            <a:off x="1277937" y="1484312"/>
+            <a:off x="976312" y="1119187"/>
             <a:ext cx="150812" cy="230187"/>
           </a:xfrm>
           <a:prstGeom prst="rect">
@@ -3974,7 +3974,7 @@
         </p:nvCxnSpPr>
         <p:spPr>
           <a:xfrm>
-            <a:off x="1317624" y="1563687"/>
+            <a:off x="1015999" y="1206499"/>
             <a:ext cx="103188" cy="0"/>
           </a:xfrm>
           <a:prstGeom prst="line">
@@ -4010,7 +4010,7 @@
         </p:nvCxnSpPr>
         <p:spPr>
           <a:xfrm>
-            <a:off x="1317624" y="1611312"/>
+            <a:off x="1015999" y="1246187"/>
             <a:ext cx="103188" cy="0"/>
           </a:xfrm>
           <a:prstGeom prst="line">
@@ -4046,7 +4046,7 @@
         </p:nvCxnSpPr>
         <p:spPr>
           <a:xfrm>
-            <a:off x="1317624" y="1650999"/>
+            <a:off x="1015999" y="1293812"/>
             <a:ext cx="71438" cy="0"/>
           </a:xfrm>
           <a:prstGeom prst="line">
@@ -4082,8 +4082,8 @@
         </p:nvSpPr>
         <p:spPr>
           <a:xfrm>
-            <a:off x="1635124" y="1428749"/>
-            <a:ext cx="2603499" cy="325437"/>
+            <a:off x="1317624" y="1023937"/>
+            <a:ext cx="2920999" cy="420687"/>
           </a:xfrm>
           <a:prstGeom prst="rect">
             <a:avLst/>
@@ -4099,7 +4099,7 @@
           <a:p>
             <a:pPr algn="l" fontAlgn="base">
               <a:lnSpc>
-                <a:spcPts val="2187"/>
+                <a:spcPts val="2812"/>
               </a:lnSpc>
               <a:spcBef>
                 <a:spcPts val="0"/>
@@ -4107,7 +4107,7 @@
               <a:spcAft>
                 <a:spcPts val="0"/>
               </a:spcAft>
-              <a:defRPr sz="1499" b="1" i="0" lang="zh-CN" dirty="0">
+              <a:defRPr sz="1937" b="1" i="0" lang="zh-CN" dirty="0">
                 <a:solidFill>
                   <a:srgbClr val="2B3E57"/>
                 </a:solidFill>
@@ -4117,7 +4117,7 @@
               </a:defRPr>
             </a:pPr>
             <a:r>
-              <a:rPr sz="1499" b="1" i="0" lang="zh-CN" dirty="0">
+              <a:rPr sz="1937" b="1" i="0" lang="zh-CN" dirty="0">
                 <a:solidFill>
                   <a:srgbClr val="2B3E57"/>
                 </a:solidFill>
@@ -4138,12 +4138,12 @@
         </p:nvSpPr>
         <p:spPr>
           <a:xfrm>
-            <a:off x="1031874" y="2079624"/>
-            <a:ext cx="3333749" cy="809624"/>
+            <a:off x="777874" y="1857374"/>
+            <a:ext cx="3555999" cy="857249"/>
           </a:xfrm>
           <a:prstGeom prst="roundRect">
             <a:avLst>
-              <a:gd name="adj" fmla="val 8823"/>
+              <a:gd name="adj" fmla="val 8333"/>
             </a:avLst>
           </a:prstGeom>
           <a:solidFill>
@@ -4186,12 +4186,12 @@
         </p:nvSpPr>
         <p:spPr>
           <a:xfrm>
-            <a:off x="1031874" y="2079624"/>
-            <a:ext cx="63499" cy="809624"/>
+            <a:off x="777874" y="1857374"/>
+            <a:ext cx="47624" cy="857249"/>
           </a:xfrm>
           <a:prstGeom prst="roundRect">
             <a:avLst>
-              <a:gd name="adj" fmla="val 37500"/>
+              <a:gd name="adj" fmla="val 50000"/>
             </a:avLst>
           </a:prstGeom>
           <a:solidFill>
@@ -4232,8 +4232,8 @@
         </p:nvCxnSpPr>
         <p:spPr>
           <a:xfrm>
-            <a:off x="1381124" y="2349499"/>
-            <a:ext cx="127000" cy="87313"/>
+            <a:off x="1079499" y="2151062"/>
+            <a:ext cx="127000" cy="79375"/>
           </a:xfrm>
           <a:prstGeom prst="line">
             <a:avLst/>
@@ -4268,8 +4268,8 @@
         </p:nvCxnSpPr>
         <p:spPr>
           <a:xfrm flipH="1">
-            <a:off x="1452562" y="2436812"/>
-            <a:ext cx="55562" cy="166687"/>
+            <a:off x="1150937" y="2230437"/>
+            <a:ext cx="55562" cy="174625"/>
           </a:xfrm>
           <a:prstGeom prst="line">
             <a:avLst/>
@@ -4304,7 +4304,7 @@
         </p:nvCxnSpPr>
         <p:spPr>
           <a:xfrm flipH="1">
-            <a:off x="1309687" y="2603499"/>
+            <a:off x="1008062" y="2405062"/>
             <a:ext cx="142875" cy="0"/>
           </a:xfrm>
           <a:prstGeom prst="line">
@@ -4340,8 +4340,8 @@
         </p:nvCxnSpPr>
         <p:spPr>
           <a:xfrm flipH="1" flipV="1">
-            <a:off x="1254124" y="2436812"/>
-            <a:ext cx="55563" cy="166687"/>
+            <a:off x="952499" y="2230437"/>
+            <a:ext cx="55563" cy="174625"/>
           </a:xfrm>
           <a:prstGeom prst="line">
             <a:avLst/>
@@ -4376,8 +4376,8 @@
         </p:nvCxnSpPr>
         <p:spPr>
           <a:xfrm flipV="1">
-            <a:off x="1254124" y="2349499"/>
-            <a:ext cx="127000" cy="87313"/>
+            <a:off x="952499" y="2151062"/>
+            <a:ext cx="127000" cy="79375"/>
           </a:xfrm>
           <a:prstGeom prst="line">
             <a:avLst/>
@@ -4412,7 +4412,7 @@
         </p:nvCxnSpPr>
         <p:spPr>
           <a:xfrm>
-            <a:off x="1381124" y="2349499"/>
+            <a:off x="1079499" y="2151062"/>
             <a:ext cx="0" cy="254000"/>
           </a:xfrm>
           <a:prstGeom prst="line">
@@ -4448,7 +4448,7 @@
         </p:nvCxnSpPr>
         <p:spPr>
           <a:xfrm>
-            <a:off x="1254124" y="2436812"/>
+            <a:off x="952499" y="2230437"/>
             <a:ext cx="254000" cy="0"/>
           </a:xfrm>
           <a:prstGeom prst="line">
@@ -4484,8 +4484,8 @@
         </p:nvSpPr>
         <p:spPr>
           <a:xfrm>
-            <a:off x="1635124" y="2317749"/>
-            <a:ext cx="2603499" cy="325437"/>
+            <a:off x="1317624" y="2071687"/>
+            <a:ext cx="2920999" cy="420687"/>
           </a:xfrm>
           <a:prstGeom prst="rect">
             <a:avLst/>
@@ -4501,7 +4501,7 @@
           <a:p>
             <a:pPr algn="l" fontAlgn="base">
               <a:lnSpc>
-                <a:spcPts val="2187"/>
+                <a:spcPts val="2812"/>
               </a:lnSpc>
               <a:spcBef>
                 <a:spcPts val="0"/>
@@ -4509,7 +4509,7 @@
               <a:spcAft>
                 <a:spcPts val="0"/>
               </a:spcAft>
-              <a:defRPr sz="1499" b="1" i="0" lang="zh-CN" dirty="0">
+              <a:defRPr sz="1937" b="1" i="0" lang="zh-CN" dirty="0">
                 <a:solidFill>
                   <a:srgbClr val="2B3E57"/>
                 </a:solidFill>
@@ -4519,7 +4519,7 @@
               </a:defRPr>
             </a:pPr>
             <a:r>
-              <a:rPr sz="1499" b="1" i="0" lang="zh-CN" dirty="0">
+              <a:rPr sz="1937" b="1" i="0" lang="zh-CN" dirty="0">
                 <a:solidFill>
                   <a:srgbClr val="2B3E57"/>
                 </a:solidFill>
@@ -4530,7 +4530,7 @@
               <a:t>同类</a:t>
             </a:r>
             <a:r>
-              <a:rPr sz="1499" b="1" i="0" lang="zh-CN" dirty="0">
+              <a:rPr sz="1937" b="1" i="0" lang="zh-CN" dirty="0">
                 <a:solidFill>
                   <a:srgbClr val="2B3E57"/>
                 </a:solidFill>
@@ -4541,7 +4541,7 @@
               <a:t> Ba–Y </a:t>
             </a:r>
             <a:r>
-              <a:rPr sz="1499" b="1" i="0" lang="zh-CN" dirty="0">
+              <a:rPr sz="1937" b="1" i="0" lang="zh-CN" dirty="0">
                 <a:solidFill>
                   <a:srgbClr val="2B3E57"/>
                 </a:solidFill>
@@ -4562,12 +4562,12 @@
         </p:nvSpPr>
         <p:spPr>
           <a:xfrm>
-            <a:off x="1031874" y="2968624"/>
-            <a:ext cx="3333749" cy="809624"/>
+            <a:off x="777874" y="2905124"/>
+            <a:ext cx="3555999" cy="857249"/>
           </a:xfrm>
           <a:prstGeom prst="roundRect">
             <a:avLst>
-              <a:gd name="adj" fmla="val 8823"/>
+              <a:gd name="adj" fmla="val 8333"/>
             </a:avLst>
           </a:prstGeom>
           <a:solidFill>
@@ -4610,12 +4610,12 @@
         </p:nvSpPr>
         <p:spPr>
           <a:xfrm>
-            <a:off x="1031874" y="2968624"/>
-            <a:ext cx="63499" cy="809624"/>
+            <a:off x="777874" y="2905124"/>
+            <a:ext cx="47624" cy="857249"/>
           </a:xfrm>
           <a:prstGeom prst="roundRect">
             <a:avLst>
-              <a:gd name="adj" fmla="val 37500"/>
+              <a:gd name="adj" fmla="val 50000"/>
             </a:avLst>
           </a:prstGeom>
           <a:solidFill>
@@ -4656,7 +4656,7 @@
         </p:nvCxnSpPr>
         <p:spPr>
           <a:xfrm>
-            <a:off x="1277937" y="3270249"/>
+            <a:off x="976312" y="3230562"/>
             <a:ext cx="206375" cy="0"/>
           </a:xfrm>
           <a:prstGeom prst="line">
@@ -4692,8 +4692,8 @@
         </p:nvCxnSpPr>
         <p:spPr>
           <a:xfrm>
-            <a:off x="1277937" y="3270249"/>
-            <a:ext cx="0" cy="206375"/>
+            <a:off x="976312" y="3230562"/>
+            <a:ext cx="0" cy="198437"/>
           </a:xfrm>
           <a:prstGeom prst="line">
             <a:avLst/>
@@ -4728,7 +4728,7 @@
         </p:nvCxnSpPr>
         <p:spPr>
           <a:xfrm>
-            <a:off x="1277937" y="3373437"/>
+            <a:off x="976312" y="3325812"/>
             <a:ext cx="206375" cy="0"/>
           </a:xfrm>
           <a:prstGeom prst="line">
@@ -4764,8 +4764,8 @@
         </p:nvCxnSpPr>
         <p:spPr>
           <a:xfrm>
-            <a:off x="1381124" y="3270249"/>
-            <a:ext cx="0" cy="206375"/>
+            <a:off x="1079499" y="3230562"/>
+            <a:ext cx="0" cy="198437"/>
           </a:xfrm>
           <a:prstGeom prst="line">
             <a:avLst/>
@@ -4800,7 +4800,7 @@
         </p:nvCxnSpPr>
         <p:spPr>
           <a:xfrm>
-            <a:off x="1277937" y="3476624"/>
+            <a:off x="976312" y="3428999"/>
             <a:ext cx="206375" cy="0"/>
           </a:xfrm>
           <a:prstGeom prst="line">
@@ -4836,8 +4836,8 @@
         </p:nvCxnSpPr>
         <p:spPr>
           <a:xfrm>
-            <a:off x="1484312" y="3270249"/>
-            <a:ext cx="0" cy="206375"/>
+            <a:off x="1182687" y="3230562"/>
+            <a:ext cx="0" cy="198437"/>
           </a:xfrm>
           <a:prstGeom prst="line">
             <a:avLst/>
@@ -4872,7 +4872,7 @@
         </p:nvSpPr>
         <p:spPr>
           <a:xfrm>
-            <a:off x="1254124" y="3246437"/>
+            <a:off x="952499" y="3206749"/>
             <a:ext cx="47624" cy="47624"/>
           </a:xfrm>
           <a:prstGeom prst="ellipse">
@@ -4916,7 +4916,7 @@
         </p:nvSpPr>
         <p:spPr>
           <a:xfrm>
-            <a:off x="1254124" y="3349624"/>
+            <a:off x="952499" y="3309937"/>
             <a:ext cx="47624" cy="47624"/>
           </a:xfrm>
           <a:prstGeom prst="ellipse">
@@ -4960,7 +4960,7 @@
         </p:nvSpPr>
         <p:spPr>
           <a:xfrm>
-            <a:off x="1254124" y="3452812"/>
+            <a:off x="952499" y="3405187"/>
             <a:ext cx="47624" cy="47624"/>
           </a:xfrm>
           <a:prstGeom prst="ellipse">
@@ -5004,7 +5004,7 @@
         </p:nvSpPr>
         <p:spPr>
           <a:xfrm>
-            <a:off x="1357312" y="3246437"/>
+            <a:off x="1055687" y="3206749"/>
             <a:ext cx="47624" cy="47624"/>
           </a:xfrm>
           <a:prstGeom prst="ellipse">
@@ -5048,7 +5048,7 @@
         </p:nvSpPr>
         <p:spPr>
           <a:xfrm>
-            <a:off x="1357312" y="3349624"/>
+            <a:off x="1055687" y="3309937"/>
             <a:ext cx="47624" cy="47624"/>
           </a:xfrm>
           <a:prstGeom prst="ellipse">
@@ -5092,7 +5092,7 @@
         </p:nvSpPr>
         <p:spPr>
           <a:xfrm>
-            <a:off x="1357312" y="3452812"/>
+            <a:off x="1055687" y="3405187"/>
             <a:ext cx="47624" cy="47624"/>
           </a:xfrm>
           <a:prstGeom prst="ellipse">
@@ -5136,7 +5136,7 @@
         </p:nvSpPr>
         <p:spPr>
           <a:xfrm>
-            <a:off x="1460499" y="3246437"/>
+            <a:off x="1158874" y="3206749"/>
             <a:ext cx="47624" cy="47624"/>
           </a:xfrm>
           <a:prstGeom prst="ellipse">
@@ -5180,7 +5180,7 @@
         </p:nvSpPr>
         <p:spPr>
           <a:xfrm>
-            <a:off x="1460499" y="3349624"/>
+            <a:off x="1158874" y="3309937"/>
             <a:ext cx="47624" cy="47624"/>
           </a:xfrm>
           <a:prstGeom prst="ellipse">
@@ -5224,7 +5224,7 @@
         </p:nvSpPr>
         <p:spPr>
           <a:xfrm>
-            <a:off x="1460499" y="3452812"/>
+            <a:off x="1158874" y="3405187"/>
             <a:ext cx="47624" cy="47624"/>
           </a:xfrm>
           <a:prstGeom prst="ellipse">
@@ -5268,8 +5268,8 @@
         </p:nvSpPr>
         <p:spPr>
           <a:xfrm>
-            <a:off x="1635124" y="3206749"/>
-            <a:ext cx="2603499" cy="325437"/>
+            <a:off x="1317624" y="3119437"/>
+            <a:ext cx="2920999" cy="420687"/>
           </a:xfrm>
           <a:prstGeom prst="rect">
             <a:avLst/>
@@ -5285,7 +5285,7 @@
           <a:p>
             <a:pPr algn="l" fontAlgn="base">
               <a:lnSpc>
-                <a:spcPts val="2187"/>
+                <a:spcPts val="2812"/>
               </a:lnSpc>
               <a:spcBef>
                 <a:spcPts val="0"/>
@@ -5293,7 +5293,7 @@
               <a:spcAft>
                 <a:spcPts val="0"/>
               </a:spcAft>
-              <a:defRPr sz="1499" b="1" i="0" lang="zh-CN" dirty="0">
+              <a:defRPr sz="1937" b="1" i="0" lang="zh-CN" dirty="0">
                 <a:solidFill>
                   <a:srgbClr val="2B3E57"/>
                 </a:solidFill>
@@ -5303,7 +5303,7 @@
               </a:defRPr>
             </a:pPr>
             <a:r>
-              <a:rPr sz="1499" b="1" i="0" lang="zh-CN" dirty="0">
+              <a:rPr sz="1937" b="1" i="0" lang="zh-CN" dirty="0">
                 <a:solidFill>
                   <a:srgbClr val="2B3E57"/>
                 </a:solidFill>
@@ -5324,12 +5324,12 @@
         </p:nvSpPr>
         <p:spPr>
           <a:xfrm>
-            <a:off x="1031874" y="3857624"/>
-            <a:ext cx="3333749" cy="809624"/>
+            <a:off x="777874" y="3944937"/>
+            <a:ext cx="3555999" cy="857249"/>
           </a:xfrm>
           <a:prstGeom prst="roundRect">
             <a:avLst>
-              <a:gd name="adj" fmla="val 8823"/>
+              <a:gd name="adj" fmla="val 8333"/>
             </a:avLst>
           </a:prstGeom>
           <a:solidFill>
@@ -5372,12 +5372,12 @@
         </p:nvSpPr>
         <p:spPr>
           <a:xfrm>
-            <a:off x="1031874" y="3857624"/>
-            <a:ext cx="63499" cy="809624"/>
+            <a:off x="777874" y="3944937"/>
+            <a:ext cx="47624" cy="857249"/>
           </a:xfrm>
           <a:prstGeom prst="roundRect">
             <a:avLst>
-              <a:gd name="adj" fmla="val 37500"/>
+              <a:gd name="adj" fmla="val 50000"/>
             </a:avLst>
           </a:prstGeom>
           <a:solidFill>
@@ -5418,7 +5418,7 @@
         </p:nvCxnSpPr>
         <p:spPr>
           <a:xfrm>
-            <a:off x="1293812" y="4198937"/>
+            <a:off x="992187" y="4310062"/>
             <a:ext cx="31750" cy="174625"/>
           </a:xfrm>
           <a:prstGeom prst="line">
@@ -5454,7 +5454,7 @@
         </p:nvCxnSpPr>
         <p:spPr>
           <a:xfrm>
-            <a:off x="1325562" y="4373562"/>
+            <a:off x="1023937" y="4484687"/>
             <a:ext cx="111125" cy="0"/>
           </a:xfrm>
           <a:prstGeom prst="line">
@@ -5490,7 +5490,7 @@
         </p:nvCxnSpPr>
         <p:spPr>
           <a:xfrm flipV="1">
-            <a:off x="1436687" y="4198937"/>
+            <a:off x="1135062" y="4310062"/>
             <a:ext cx="31750" cy="174625"/>
           </a:xfrm>
           <a:prstGeom prst="line">
@@ -5526,7 +5526,7 @@
         </p:nvCxnSpPr>
         <p:spPr>
           <a:xfrm>
-            <a:off x="1269999" y="4198937"/>
+            <a:off x="968374" y="4310062"/>
             <a:ext cx="222250" cy="0"/>
           </a:xfrm>
           <a:prstGeom prst="line">
@@ -5562,8 +5562,8 @@
         </p:nvSpPr>
         <p:spPr>
           <a:xfrm>
-            <a:off x="1635124" y="4095749"/>
-            <a:ext cx="2603499" cy="325437"/>
+            <a:off x="1317624" y="4167187"/>
+            <a:ext cx="2920999" cy="420687"/>
           </a:xfrm>
           <a:prstGeom prst="rect">
             <a:avLst/>
@@ -5579,7 +5579,7 @@
           <a:p>
             <a:pPr algn="l" fontAlgn="base">
               <a:lnSpc>
-                <a:spcPts val="2187"/>
+                <a:spcPts val="2812"/>
               </a:lnSpc>
               <a:spcBef>
                 <a:spcPts val="0"/>
@@ -5587,7 +5587,7 @@
               <a:spcAft>
                 <a:spcPts val="0"/>
               </a:spcAft>
-              <a:defRPr sz="1499" b="1" i="0" lang="zh-CN" dirty="0">
+              <a:defRPr sz="1937" b="1" i="0" lang="zh-CN" dirty="0">
                 <a:solidFill>
                   <a:srgbClr val="2B3E57"/>
                 </a:solidFill>
@@ -5597,7 +5597,7 @@
               </a:defRPr>
             </a:pPr>
             <a:r>
-              <a:rPr sz="1499" b="1" i="0" lang="zh-CN" dirty="0">
+              <a:rPr sz="1937" b="1" i="0" lang="zh-CN" dirty="0">
                 <a:solidFill>
                   <a:srgbClr val="2B3E57"/>
                 </a:solidFill>
@@ -5618,12 +5618,12 @@
         </p:nvSpPr>
         <p:spPr>
           <a:xfrm>
-            <a:off x="1031874" y="5556249"/>
-            <a:ext cx="3333749" cy="888999"/>
+            <a:off x="777874" y="5087937"/>
+            <a:ext cx="3555999" cy="857249"/>
           </a:xfrm>
           <a:prstGeom prst="roundRect">
             <a:avLst>
-              <a:gd name="adj" fmla="val 8035"/>
+              <a:gd name="adj" fmla="val 8333"/>
             </a:avLst>
           </a:prstGeom>
           <a:solidFill>
@@ -5669,7 +5669,7 @@
         </p:nvSpPr>
         <p:spPr>
           <a:xfrm>
-            <a:off x="1293812" y="5889624"/>
+            <a:off x="976312" y="5397499"/>
             <a:ext cx="150812" cy="230187"/>
           </a:xfrm>
           <a:prstGeom prst="rect">
@@ -5713,7 +5713,7 @@
         </p:nvCxnSpPr>
         <p:spPr>
           <a:xfrm>
-            <a:off x="1333499" y="5968999"/>
+            <a:off x="1015999" y="5484812"/>
             <a:ext cx="103188" cy="0"/>
           </a:xfrm>
           <a:prstGeom prst="line">
@@ -5749,7 +5749,7 @@
         </p:nvCxnSpPr>
         <p:spPr>
           <a:xfrm>
-            <a:off x="1333499" y="6016624"/>
+            <a:off x="1015999" y="5524499"/>
             <a:ext cx="103188" cy="0"/>
           </a:xfrm>
           <a:prstGeom prst="line">
@@ -5785,7 +5785,7 @@
         </p:nvCxnSpPr>
         <p:spPr>
           <a:xfrm>
-            <a:off x="1333499" y="6056312"/>
+            <a:off x="1015999" y="5572124"/>
             <a:ext cx="71438" cy="0"/>
           </a:xfrm>
           <a:prstGeom prst="line">
@@ -5821,7 +5821,7 @@
         </p:nvCxnSpPr>
         <p:spPr>
           <a:xfrm flipV="1">
-            <a:off x="1285874" y="5873749"/>
+            <a:off x="968374" y="5389562"/>
             <a:ext cx="222250" cy="254000"/>
           </a:xfrm>
           <a:prstGeom prst="line">
@@ -5857,8 +5857,8 @@
         </p:nvSpPr>
         <p:spPr>
           <a:xfrm>
-            <a:off x="1650999" y="5841999"/>
-            <a:ext cx="2571749" cy="325437"/>
+            <a:off x="1317624" y="5302249"/>
+            <a:ext cx="2920999" cy="420687"/>
           </a:xfrm>
           <a:prstGeom prst="rect">
             <a:avLst/>
@@ -5874,7 +5874,7 @@
           <a:p>
             <a:pPr algn="l" fontAlgn="base">
               <a:lnSpc>
-                <a:spcPts val="2187"/>
+                <a:spcPts val="2812"/>
               </a:lnSpc>
               <a:spcBef>
                 <a:spcPts val="0"/>
@@ -5882,7 +5882,7 @@
               <a:spcAft>
                 <a:spcPts val="0"/>
               </a:spcAft>
-              <a:defRPr sz="1499" b="1" i="0" lang="zh-CN" dirty="0">
+              <a:defRPr sz="1937" b="1" i="0" lang="zh-CN" dirty="0">
                 <a:solidFill>
                   <a:srgbClr val="5B6570"/>
                 </a:solidFill>
@@ -5892,7 +5892,7 @@
               </a:defRPr>
             </a:pPr>
             <a:r>
-              <a:rPr sz="1499" b="1" i="0" lang="zh-CN" dirty="0">
+              <a:rPr sz="1937" b="1" i="0" lang="zh-CN" dirty="0">
                 <a:solidFill>
                   <a:srgbClr val="5B6570"/>
                 </a:solidFill>
@@ -5907,14 +5907,218 @@
       </p:sp>
       <p:sp>
         <p:nvSpPr>
-          <p:cNvPr id="57" name="ax_u" descr="Editable line; source id ax_u"/>
+          <p:cNvPr id="57" name="ax_n" descr="Editable text; source id ax_n"/>
+          <p:cNvSpPr txBox="1"/>
+          <p:nvPr/>
+        </p:nvSpPr>
+        <p:spPr>
+          <a:xfrm>
+            <a:off x="349249" y="809624"/>
+            <a:ext cx="412749" cy="349249"/>
+          </a:xfrm>
+          <a:prstGeom prst="rect">
+            <a:avLst/>
+          </a:prstGeom>
+          <a:noFill/>
+          <a:effectLst/>
+        </p:spPr>
+        <p:txBody>
+          <a:bodyPr wrap="none" anchor="ctr" tIns="0" rIns="0" bIns="0" lIns="0" anchorCtr="0" vertOverflow="overflow">
+            <a:noAutofit/>
+          </a:bodyPr>
+          <a:lstStyle/>
+          <a:p>
+            <a:pPr algn="ctr" fontAlgn="base">
+              <a:lnSpc>
+                <a:spcPts val="2359"/>
+              </a:lnSpc>
+              <a:spcBef>
+                <a:spcPts val="0"/>
+              </a:spcBef>
+              <a:spcAft>
+                <a:spcPts val="0"/>
+              </a:spcAft>
+              <a:defRPr sz="1624" b="0" i="0" lang="zh-CN" dirty="0">
+                <a:solidFill>
+                  <a:srgbClr val="27303A"/>
+                </a:solidFill>
+                <a:latin typeface="Noto Sans CJK SC"/>
+                <a:ea typeface="Noto Sans CJK SC"/>
+                <a:cs typeface="Noto Sans CJK SC"/>
+              </a:defRPr>
+            </a:pPr>
+            <a:r>
+              <a:rPr sz="1624" b="0" i="0" lang="zh-CN" dirty="0">
+                <a:solidFill>
+                  <a:srgbClr val="27303A"/>
+                </a:solidFill>
+                <a:latin typeface="Noto Sans CJK SC"/>
+                <a:ea typeface="Noto Sans CJK SC"/>
+                <a:cs typeface="Noto Sans CJK SC"/>
+              </a:rPr>
+              <a:t>近</a:t>
+            </a:r>
+          </a:p>
+        </p:txBody>
+      </p:sp>
+      <p:sp>
+        <p:nvSpPr>
+          <p:cNvPr id="58" name="ax_f" descr="Editable text; source id ax_f"/>
+          <p:cNvSpPr txBox="1"/>
+          <p:nvPr/>
+        </p:nvSpPr>
+        <p:spPr>
+          <a:xfrm>
+            <a:off x="349249" y="4452937"/>
+            <a:ext cx="412749" cy="349249"/>
+          </a:xfrm>
+          <a:prstGeom prst="rect">
+            <a:avLst/>
+          </a:prstGeom>
+          <a:noFill/>
+          <a:effectLst/>
+        </p:spPr>
+        <p:txBody>
+          <a:bodyPr wrap="none" anchor="ctr" tIns="0" rIns="0" bIns="0" lIns="0" anchorCtr="0" vertOverflow="overflow">
+            <a:noAutofit/>
+          </a:bodyPr>
+          <a:lstStyle/>
+          <a:p>
+            <a:pPr algn="ctr" fontAlgn="base">
+              <a:lnSpc>
+                <a:spcPts val="2359"/>
+              </a:lnSpc>
+              <a:spcBef>
+                <a:spcPts val="0"/>
+              </a:spcBef>
+              <a:spcAft>
+                <a:spcPts val="0"/>
+              </a:spcAft>
+              <a:defRPr sz="1624" b="0" i="0" lang="zh-CN" dirty="0">
+                <a:solidFill>
+                  <a:srgbClr val="27303A"/>
+                </a:solidFill>
+                <a:latin typeface="Noto Sans CJK SC"/>
+                <a:ea typeface="Noto Sans CJK SC"/>
+                <a:cs typeface="Noto Sans CJK SC"/>
+              </a:defRPr>
+            </a:pPr>
+            <a:r>
+              <a:rPr sz="1624" b="0" i="0" lang="zh-CN" dirty="0">
+                <a:solidFill>
+                  <a:srgbClr val="27303A"/>
+                </a:solidFill>
+                <a:latin typeface="Noto Sans CJK SC"/>
+                <a:ea typeface="Noto Sans CJK SC"/>
+                <a:cs typeface="Noto Sans CJK SC"/>
+              </a:rPr>
+              <a:t>远</a:t>
+            </a:r>
+          </a:p>
+        </p:txBody>
+      </p:sp>
+      <p:sp>
+        <p:nvSpPr>
+          <p:cNvPr id="59" name="ax_l" descr="Editable text; source id ax_l"/>
+          <p:cNvSpPr txBox="1"/>
+          <p:nvPr/>
+        </p:nvSpPr>
+        <p:spPr>
+          <a:xfrm rot="16200000">
+            <a:off x="-238124" y="2627312"/>
+            <a:ext cx="1579562" cy="357187"/>
+          </a:xfrm>
+          <a:prstGeom prst="rect">
+            <a:avLst/>
+          </a:prstGeom>
+          <a:noFill/>
+          <a:effectLst/>
+        </p:spPr>
+        <p:txBody>
+          <a:bodyPr wrap="none" anchor="ctr" tIns="0" rIns="0" bIns="0" lIns="0" anchorCtr="0" vertOverflow="overflow">
+            <a:noAutofit/>
+          </a:bodyPr>
+          <a:lstStyle/>
+          <a:p>
+            <a:pPr algn="ctr" fontAlgn="base">
+              <a:lnSpc>
+                <a:spcPts val="2359"/>
+              </a:lnSpc>
+              <a:spcBef>
+                <a:spcPts val="0"/>
+              </a:spcBef>
+              <a:spcAft>
+                <a:spcPts val="0"/>
+              </a:spcAft>
+              <a:defRPr sz="1624" b="0" i="0" lang="zh-CN" dirty="0">
+                <a:solidFill>
+                  <a:srgbClr val="27303A"/>
+                </a:solidFill>
+                <a:latin typeface="Noto Sans CJK SC"/>
+                <a:ea typeface="Noto Sans CJK SC"/>
+                <a:cs typeface="Noto Sans CJK SC"/>
+              </a:defRPr>
+            </a:pPr>
+            <a:r>
+              <a:rPr sz="1624" b="0" i="0" lang="zh-CN" dirty="0">
+                <a:solidFill>
+                  <a:srgbClr val="27303A"/>
+                </a:solidFill>
+                <a:latin typeface="Noto Sans CJK SC"/>
+                <a:ea typeface="Noto Sans CJK SC"/>
+                <a:cs typeface="Noto Sans CJK SC"/>
+              </a:rPr>
+              <a:t>与目标相的距离</a:t>
+            </a:r>
+          </a:p>
+        </p:txBody>
+      </p:sp>
+      <p:cxnSp>
+        <p:nvCxnSpPr>
+          <p:cNvPr id="60" name="ax_u" descr="Editable line; source id ax_u"/>
+          <p:cNvCxnSpPr/>
+          <p:nvPr/>
+        </p:nvCxnSpPr>
+        <p:spPr>
+          <a:xfrm>
+            <a:off x="555624" y="1206499"/>
+            <a:ext cx="0" cy="746125"/>
+          </a:xfrm>
+          <a:prstGeom prst="line">
+            <a:avLst/>
+          </a:prstGeom>
+          <a:ln w="17462">
+            <a:solidFill>
+              <a:srgbClr val="27303A"/>
+            </a:solidFill>
+          </a:ln>
+          <a:effectLst/>
+        </p:spPr>
+        <p:style>
+          <a:lnRef idx="2">
+            <a:schemeClr val="accent1"/>
+          </a:lnRef>
+          <a:fillRef idx="0">
+            <a:schemeClr val="accent1"/>
+          </a:fillRef>
+          <a:effectRef idx="0">
+            <a:schemeClr val="accent1"/>
+          </a:effectRef>
+          <a:fontRef idx="minor">
+            <a:schemeClr val="tx1"/>
+          </a:fontRef>
+        </p:style>
+      </p:cxnSp>
+      <p:sp>
+        <p:nvSpPr>
+          <p:cNvPr id="61" name="ax_d" descr="Editable line; source id ax_d"/>
           <p:cNvSpPr/>
           <p:nvPr/>
         </p:nvSpPr>
         <p:spPr>
           <a:xfrm>
-            <a:off x="448469" y="1381125"/>
-            <a:ext cx="87312" cy="2103437"/>
+            <a:off x="515937" y="3659187"/>
+            <a:ext cx="79375" cy="746125"/>
           </a:xfrm>
           <a:custGeom>
             <a:avLst/>
@@ -5923,27 +6127,27 @@
             <a:cxnLst/>
             <a:rect l="l" t="t" r="r" b="b"/>
             <a:pathLst>
-              <a:path w="11000" h="265000">
+              <a:path w="10000" h="94000">
                 <a:moveTo>
-                  <a:pt x="4400" y="265000"/>
+                  <a:pt x="6100" y="0"/>
                 </a:moveTo>
                 <a:lnTo>
-                  <a:pt x="4400" y="14000"/>
+                  <a:pt x="6100" y="81000"/>
                 </a:lnTo>
                 <a:lnTo>
-                  <a:pt x="0" y="14000"/>
+                  <a:pt x="10000" y="81000"/>
                 </a:lnTo>
                 <a:lnTo>
-                  <a:pt x="5500" y="0"/>
+                  <a:pt x="5000" y="94000"/>
                 </a:lnTo>
                 <a:lnTo>
-                  <a:pt x="11000" y="14000"/>
+                  <a:pt x="0" y="81000"/>
                 </a:lnTo>
                 <a:lnTo>
-                  <a:pt x="6600" y="14000"/>
+                  <a:pt x="3900" y="81000"/>
                 </a:lnTo>
                 <a:lnTo>
-                  <a:pt x="6600" y="265000"/>
+                  <a:pt x="3900" y="0"/>
                 </a:lnTo>
                 <a:close/>
               </a:path>
@@ -5981,50 +6185,70 @@
       </p:sp>
       <p:sp>
         <p:nvSpPr>
-          <p:cNvPr id="58" name="ax_d" descr="Editable line; source id ax_d"/>
+          <p:cNvPr id="62" name="led" descr="Editable shape; source id led"/>
           <p:cNvSpPr/>
           <p:nvPr/>
         </p:nvSpPr>
         <p:spPr>
           <a:xfrm>
-            <a:off x="448469" y="4151312"/>
-            <a:ext cx="87312" cy="2103437"/>
-          </a:xfrm>
-          <a:custGeom>
-            <a:avLst/>
-            <a:gdLst/>
-            <a:ahLst/>
-            <a:cxnLst/>
-            <a:rect l="l" t="t" r="r" b="b"/>
-            <a:pathLst>
-              <a:path w="11000" h="265000">
-                <a:moveTo>
-                  <a:pt x="6600" y="0"/>
-                </a:moveTo>
-                <a:lnTo>
-                  <a:pt x="6600" y="251000"/>
-                </a:lnTo>
-                <a:lnTo>
-                  <a:pt x="11000" y="251000"/>
-                </a:lnTo>
-                <a:lnTo>
-                  <a:pt x="5500" y="265000"/>
-                </a:lnTo>
-                <a:lnTo>
-                  <a:pt x="0" y="251000"/>
-                </a:lnTo>
-                <a:lnTo>
-                  <a:pt x="4400" y="251000"/>
-                </a:lnTo>
-                <a:lnTo>
-                  <a:pt x="4400" y="0"/>
-                </a:lnTo>
-                <a:close/>
-              </a:path>
-            </a:pathLst>
-          </a:custGeom>
+            <a:off x="4778374" y="809624"/>
+            <a:ext cx="2920999" cy="3992562"/>
+          </a:xfrm>
+          <a:prstGeom prst="roundRect">
+            <a:avLst>
+              <a:gd name="adj" fmla="val 2445"/>
+            </a:avLst>
+          </a:prstGeom>
           <a:solidFill>
-            <a:srgbClr val="27303A"/>
+            <a:srgbClr val="FFFFFF"/>
+          </a:solidFill>
+          <a:ln w="15081">
+            <a:solidFill>
+              <a:srgbClr val="1F7F8C"/>
+            </a:solidFill>
+          </a:ln>
+          <a:effectLst/>
+        </p:spPr>
+        <p:style>
+          <a:lnRef idx="1">
+            <a:schemeClr val="accent1"/>
+          </a:lnRef>
+          <a:fillRef idx="3">
+            <a:schemeClr val="accent1"/>
+          </a:fillRef>
+          <a:effectRef idx="0">
+            <a:schemeClr val="accent1"/>
+          </a:effectRef>
+          <a:fontRef idx="minor">
+            <a:schemeClr val="lt1"/>
+          </a:fontRef>
+        </p:style>
+        <p:txBody>
+          <a:bodyPr rtlCol="0" anchor="ctr"/>
+          <a:lstStyle/>
+          <a:p>
+            <a:pPr algn="ctr"/>
+          </a:p>
+        </p:txBody>
+      </p:sp>
+      <p:sp>
+        <p:nvSpPr>
+          <p:cNvPr id="63" name="led_b" descr="Editable shape; source id led_b"/>
+          <p:cNvSpPr/>
+          <p:nvPr/>
+        </p:nvSpPr>
+        <p:spPr>
+          <a:xfrm>
+            <a:off x="4778374" y="809624"/>
+            <a:ext cx="47624" cy="3992562"/>
+          </a:xfrm>
+          <a:prstGeom prst="roundRect">
+            <a:avLst>
+              <a:gd name="adj" fmla="val 50000"/>
+            </a:avLst>
+          </a:prstGeom>
+          <a:solidFill>
+            <a:srgbClr val="1F7F8C"/>
           </a:solidFill>
           <a:ln>
             <a:noFill/>
@@ -6055,14 +6279,202 @@
       </p:sp>
       <p:sp>
         <p:nvSpPr>
-          <p:cNvPr id="59" name="ax_n" descr="Editable text; source id ax_n"/>
+          <p:cNvPr id="64" name="led_g_b" descr="Editable shape; source id led_g_b"/>
+          <p:cNvSpPr/>
+          <p:nvPr/>
+        </p:nvSpPr>
+        <p:spPr>
+          <a:xfrm>
+            <a:off x="6127749" y="1000124"/>
+            <a:ext cx="261937" cy="230187"/>
+          </a:xfrm>
+          <a:prstGeom prst="rect">
+            <a:avLst/>
+          </a:prstGeom>
+          <a:noFill/>
+          <a:ln w="18216">
+            <a:solidFill>
+              <a:srgbClr val="111A24"/>
+            </a:solidFill>
+          </a:ln>
+          <a:effectLst/>
+        </p:spPr>
+        <p:style>
+          <a:lnRef idx="1">
+            <a:schemeClr val="accent1"/>
+          </a:lnRef>
+          <a:fillRef idx="3">
+            <a:schemeClr val="accent1"/>
+          </a:fillRef>
+          <a:effectRef idx="0">
+            <a:schemeClr val="accent1"/>
+          </a:effectRef>
+          <a:fontRef idx="minor">
+            <a:schemeClr val="lt1"/>
+          </a:fontRef>
+        </p:style>
+        <p:txBody>
+          <a:bodyPr rtlCol="0" anchor="ctr"/>
+          <a:lstStyle/>
+          <a:p>
+            <a:pPr algn="ctr"/>
+          </a:p>
+        </p:txBody>
+      </p:sp>
+      <p:cxnSp>
+        <p:nvCxnSpPr>
+          <p:cNvPr id="65" name="led_g_r1" descr="Editable line; source id led_g_r1"/>
+          <p:cNvCxnSpPr/>
+          <p:nvPr/>
+        </p:nvCxnSpPr>
+        <p:spPr>
+          <a:xfrm>
+            <a:off x="6127749" y="1079499"/>
+            <a:ext cx="269875" cy="0"/>
+          </a:xfrm>
+          <a:prstGeom prst="line">
+            <a:avLst/>
+          </a:prstGeom>
+          <a:ln w="18216">
+            <a:solidFill>
+              <a:srgbClr val="111A24"/>
+            </a:solidFill>
+          </a:ln>
+          <a:effectLst/>
+        </p:spPr>
+        <p:style>
+          <a:lnRef idx="2">
+            <a:schemeClr val="accent1"/>
+          </a:lnRef>
+          <a:fillRef idx="0">
+            <a:schemeClr val="accent1"/>
+          </a:fillRef>
+          <a:effectRef idx="0">
+            <a:schemeClr val="accent1"/>
+          </a:effectRef>
+          <a:fontRef idx="minor">
+            <a:schemeClr val="tx1"/>
+          </a:fontRef>
+        </p:style>
+      </p:cxnSp>
+      <p:cxnSp>
+        <p:nvCxnSpPr>
+          <p:cNvPr id="66" name="led_g_r2" descr="Editable line; source id led_g_r2"/>
+          <p:cNvCxnSpPr/>
+          <p:nvPr/>
+        </p:nvCxnSpPr>
+        <p:spPr>
+          <a:xfrm>
+            <a:off x="6127749" y="1150937"/>
+            <a:ext cx="269875" cy="0"/>
+          </a:xfrm>
+          <a:prstGeom prst="line">
+            <a:avLst/>
+          </a:prstGeom>
+          <a:ln w="18216">
+            <a:solidFill>
+              <a:srgbClr val="111A24"/>
+            </a:solidFill>
+          </a:ln>
+          <a:effectLst/>
+        </p:spPr>
+        <p:style>
+          <a:lnRef idx="2">
+            <a:schemeClr val="accent1"/>
+          </a:lnRef>
+          <a:fillRef idx="0">
+            <a:schemeClr val="accent1"/>
+          </a:fillRef>
+          <a:effectRef idx="0">
+            <a:schemeClr val="accent1"/>
+          </a:effectRef>
+          <a:fontRef idx="minor">
+            <a:schemeClr val="tx1"/>
+          </a:fontRef>
+        </p:style>
+      </p:cxnSp>
+      <p:cxnSp>
+        <p:nvCxnSpPr>
+          <p:cNvPr id="67" name="led_g_c1" descr="Editable line; source id led_g_c1"/>
+          <p:cNvCxnSpPr/>
+          <p:nvPr/>
+        </p:nvCxnSpPr>
+        <p:spPr>
+          <a:xfrm>
+            <a:off x="6215062" y="1000124"/>
+            <a:ext cx="0" cy="230188"/>
+          </a:xfrm>
+          <a:prstGeom prst="line">
+            <a:avLst/>
+          </a:prstGeom>
+          <a:ln w="18216">
+            <a:solidFill>
+              <a:srgbClr val="111A24"/>
+            </a:solidFill>
+          </a:ln>
+          <a:effectLst/>
+        </p:spPr>
+        <p:style>
+          <a:lnRef idx="2">
+            <a:schemeClr val="accent1"/>
+          </a:lnRef>
+          <a:fillRef idx="0">
+            <a:schemeClr val="accent1"/>
+          </a:fillRef>
+          <a:effectRef idx="0">
+            <a:schemeClr val="accent1"/>
+          </a:effectRef>
+          <a:fontRef idx="minor">
+            <a:schemeClr val="tx1"/>
+          </a:fontRef>
+        </p:style>
+      </p:cxnSp>
+      <p:cxnSp>
+        <p:nvCxnSpPr>
+          <p:cNvPr id="68" name="led_g_c2" descr="Editable line; source id led_g_c2"/>
+          <p:cNvCxnSpPr/>
+          <p:nvPr/>
+        </p:nvCxnSpPr>
+        <p:spPr>
+          <a:xfrm>
+            <a:off x="6310312" y="1000124"/>
+            <a:ext cx="0" cy="230188"/>
+          </a:xfrm>
+          <a:prstGeom prst="line">
+            <a:avLst/>
+          </a:prstGeom>
+          <a:ln w="18216">
+            <a:solidFill>
+              <a:srgbClr val="111A24"/>
+            </a:solidFill>
+          </a:ln>
+          <a:effectLst/>
+        </p:spPr>
+        <p:style>
+          <a:lnRef idx="2">
+            <a:schemeClr val="accent1"/>
+          </a:lnRef>
+          <a:fillRef idx="0">
+            <a:schemeClr val="accent1"/>
+          </a:fillRef>
+          <a:effectRef idx="0">
+            <a:schemeClr val="accent1"/>
+          </a:effectRef>
+          <a:fontRef idx="minor">
+            <a:schemeClr val="tx1"/>
+          </a:fontRef>
+        </p:style>
+      </p:cxnSp>
+      <p:sp>
+        <p:nvSpPr>
+          <p:cNvPr id="69" name="led_t" descr="Editable text; source id led_t"/>
           <p:cNvSpPr txBox="1"/>
           <p:nvPr/>
         </p:nvSpPr>
         <p:spPr>
           <a:xfrm>
-            <a:off x="301624" y="1095374"/>
-            <a:ext cx="380999" cy="269874"/>
+            <a:off x="4937124" y="1349374"/>
+            <a:ext cx="2651124" cy="420687"/>
           </a:xfrm>
           <a:prstGeom prst="rect">
             <a:avLst/>
@@ -6078,7 +6490,7 @@
           <a:p>
             <a:pPr algn="ctr" fontAlgn="base">
               <a:lnSpc>
-                <a:spcPts val="1640"/>
+                <a:spcPts val="2812"/>
               </a:lnSpc>
               <a:spcBef>
                 <a:spcPts val="0"/>
@@ -6086,7 +6498,227 @@
               <a:spcAft>
                 <a:spcPts val="0"/>
               </a:spcAft>
-              <a:defRPr sz="1124" b="1" i="0" lang="zh-CN" dirty="0">
+              <a:defRPr sz="1937" b="1" i="0" lang="zh-CN" dirty="0">
+                <a:solidFill>
+                  <a:srgbClr val="0F4F58"/>
+                </a:solidFill>
+                <a:latin typeface="Noto Sans CJK SC"/>
+                <a:ea typeface="Noto Sans CJK SC"/>
+                <a:cs typeface="Noto Sans CJK SC"/>
+              </a:defRPr>
+            </a:pPr>
+            <a:r>
+              <a:rPr sz="1937" b="1" i="0" lang="zh-CN" dirty="0">
+                <a:solidFill>
+                  <a:srgbClr val="0F4F58"/>
+                </a:solidFill>
+                <a:latin typeface="Noto Sans CJK SC"/>
+                <a:ea typeface="Noto Sans CJK SC"/>
+                <a:cs typeface="Noto Sans CJK SC"/>
+              </a:rPr>
+              <a:t>相同实验项目下比较</a:t>
+            </a:r>
+          </a:p>
+        </p:txBody>
+      </p:sp>
+      <p:sp>
+        <p:nvSpPr>
+          <p:cNvPr id="70" name="ledr_r0" descr="Editable shape; source id ledr_r0"/>
+          <p:cNvSpPr/>
+          <p:nvPr/>
+        </p:nvSpPr>
+        <p:spPr>
+          <a:xfrm>
+            <a:off x="4937124" y="1865312"/>
+            <a:ext cx="2651124" cy="428624"/>
+          </a:xfrm>
+          <a:prstGeom prst="roundRect">
+            <a:avLst>
+              <a:gd name="adj" fmla="val 11111"/>
+            </a:avLst>
+          </a:prstGeom>
+          <a:solidFill>
+            <a:srgbClr val="F4F7FA"/>
+          </a:solidFill>
+          <a:ln w="12699">
+            <a:solidFill>
+              <a:srgbClr val="AEBBC7"/>
+            </a:solidFill>
+          </a:ln>
+          <a:effectLst/>
+        </p:spPr>
+        <p:style>
+          <a:lnRef idx="1">
+            <a:schemeClr val="accent1"/>
+          </a:lnRef>
+          <a:fillRef idx="3">
+            <a:schemeClr val="accent1"/>
+          </a:fillRef>
+          <a:effectRef idx="0">
+            <a:schemeClr val="accent1"/>
+          </a:effectRef>
+          <a:fontRef idx="minor">
+            <a:schemeClr val="lt1"/>
+          </a:fontRef>
+        </p:style>
+        <p:txBody>
+          <a:bodyPr rtlCol="0" anchor="ctr"/>
+          <a:lstStyle/>
+          <a:p>
+            <a:pPr algn="ctr"/>
+          </a:p>
+        </p:txBody>
+      </p:sp>
+      <p:sp>
+        <p:nvSpPr>
+          <p:cNvPr id="71" name="ledr_c0_b" descr="Editable shape; source id ledr_c0_b"/>
+          <p:cNvSpPr/>
+          <p:nvPr/>
+        </p:nvSpPr>
+        <p:spPr>
+          <a:xfrm>
+            <a:off x="5048249" y="2008187"/>
+            <a:ext cx="142874" cy="142874"/>
+          </a:xfrm>
+          <a:prstGeom prst="rect">
+            <a:avLst/>
+          </a:prstGeom>
+          <a:noFill/>
+          <a:ln w="18216">
+            <a:solidFill>
+              <a:srgbClr val="111A24"/>
+            </a:solidFill>
+          </a:ln>
+          <a:effectLst/>
+        </p:spPr>
+        <p:style>
+          <a:lnRef idx="1">
+            <a:schemeClr val="accent1"/>
+          </a:lnRef>
+          <a:fillRef idx="3">
+            <a:schemeClr val="accent1"/>
+          </a:fillRef>
+          <a:effectRef idx="0">
+            <a:schemeClr val="accent1"/>
+          </a:effectRef>
+          <a:fontRef idx="minor">
+            <a:schemeClr val="lt1"/>
+          </a:fontRef>
+        </p:style>
+        <p:txBody>
+          <a:bodyPr rtlCol="0" anchor="ctr"/>
+          <a:lstStyle/>
+          <a:p>
+            <a:pPr algn="ctr"/>
+          </a:p>
+        </p:txBody>
+      </p:sp>
+      <p:cxnSp>
+        <p:nvCxnSpPr>
+          <p:cNvPr id="72" name="ledr_c0_k_0" descr="Editable line; source id ledr_c0_k_0"/>
+          <p:cNvCxnSpPr/>
+          <p:nvPr/>
+        </p:nvCxnSpPr>
+        <p:spPr>
+          <a:xfrm>
+            <a:off x="5079999" y="2079624"/>
+            <a:ext cx="31750" cy="31750"/>
+          </a:xfrm>
+          <a:prstGeom prst="line">
+            <a:avLst/>
+          </a:prstGeom>
+          <a:ln w="23681">
+            <a:solidFill>
+              <a:srgbClr val="111A24"/>
+            </a:solidFill>
+          </a:ln>
+          <a:effectLst/>
+        </p:spPr>
+        <p:style>
+          <a:lnRef idx="2">
+            <a:schemeClr val="accent1"/>
+          </a:lnRef>
+          <a:fillRef idx="0">
+            <a:schemeClr val="accent1"/>
+          </a:fillRef>
+          <a:effectRef idx="0">
+            <a:schemeClr val="accent1"/>
+          </a:effectRef>
+          <a:fontRef idx="minor">
+            <a:schemeClr val="tx1"/>
+          </a:fontRef>
+        </p:style>
+      </p:cxnSp>
+      <p:cxnSp>
+        <p:nvCxnSpPr>
+          <p:cNvPr id="73" name="ledr_c0_k_1" descr="Editable line; source id ledr_c0_k_1"/>
+          <p:cNvCxnSpPr/>
+          <p:nvPr/>
+        </p:nvCxnSpPr>
+        <p:spPr>
+          <a:xfrm flipV="1">
+            <a:off x="5111749" y="2047874"/>
+            <a:ext cx="55563" cy="63500"/>
+          </a:xfrm>
+          <a:prstGeom prst="line">
+            <a:avLst/>
+          </a:prstGeom>
+          <a:ln w="23681">
+            <a:solidFill>
+              <a:srgbClr val="111A24"/>
+            </a:solidFill>
+          </a:ln>
+          <a:effectLst/>
+        </p:spPr>
+        <p:style>
+          <a:lnRef idx="2">
+            <a:schemeClr val="accent1"/>
+          </a:lnRef>
+          <a:fillRef idx="0">
+            <a:schemeClr val="accent1"/>
+          </a:fillRef>
+          <a:effectRef idx="0">
+            <a:schemeClr val="accent1"/>
+          </a:effectRef>
+          <a:fontRef idx="minor">
+            <a:schemeClr val="tx1"/>
+          </a:fontRef>
+        </p:style>
+      </p:cxnSp>
+      <p:sp>
+        <p:nvSpPr>
+          <p:cNvPr id="74" name="ledr_x0" descr="Editable text; source id ledr_x0"/>
+          <p:cNvSpPr txBox="1"/>
+          <p:nvPr/>
+        </p:nvSpPr>
+        <p:spPr>
+          <a:xfrm>
+            <a:off x="5302249" y="1889124"/>
+            <a:ext cx="2158999" cy="388937"/>
+          </a:xfrm>
+          <a:prstGeom prst="rect">
+            <a:avLst/>
+          </a:prstGeom>
+          <a:noFill/>
+          <a:effectLst/>
+        </p:spPr>
+        <p:txBody>
+          <a:bodyPr wrap="none" anchor="ctr" tIns="0" rIns="0" bIns="0" lIns="0" anchorCtr="0" vertOverflow="overflow">
+            <a:noAutofit/>
+          </a:bodyPr>
+          <a:lstStyle/>
+          <a:p>
+            <a:pPr algn="l" fontAlgn="base">
+              <a:lnSpc>
+                <a:spcPts val="2546"/>
+              </a:lnSpc>
+              <a:spcBef>
+                <a:spcPts val="0"/>
+              </a:spcBef>
+              <a:spcAft>
+                <a:spcPts val="0"/>
+              </a:spcAft>
+              <a:defRPr sz="1749" b="0" i="0" lang="zh-CN" dirty="0">
                 <a:solidFill>
                   <a:srgbClr val="27303A"/>
                 </a:solidFill>
@@ -6096,7 +6728,7 @@
               </a:defRPr>
             </a:pPr>
             <a:r>
-              <a:rPr sz="1124" b="1" i="0" lang="zh-CN" dirty="0">
+              <a:rPr sz="1749" b="0" i="0" lang="zh-CN" dirty="0">
                 <a:solidFill>
                   <a:srgbClr val="27303A"/>
                 </a:solidFill>
@@ -6104,21 +6736,185 @@
                 <a:ea typeface="Noto Sans CJK SC"/>
                 <a:cs typeface="Noto Sans CJK SC"/>
               </a:rPr>
-              <a:t>近</a:t>
+              <a:t>原料与配比</a:t>
             </a:r>
           </a:p>
         </p:txBody>
       </p:sp>
       <p:sp>
         <p:nvSpPr>
-          <p:cNvPr id="60" name="ax_f" descr="Editable text; source id ax_f"/>
+          <p:cNvPr id="75" name="ledr_r1" descr="Editable shape; source id ledr_r1"/>
+          <p:cNvSpPr/>
+          <p:nvPr/>
+        </p:nvSpPr>
+        <p:spPr>
+          <a:xfrm>
+            <a:off x="4937124" y="2341562"/>
+            <a:ext cx="2651124" cy="428624"/>
+          </a:xfrm>
+          <a:prstGeom prst="roundRect">
+            <a:avLst>
+              <a:gd name="adj" fmla="val 11111"/>
+            </a:avLst>
+          </a:prstGeom>
+          <a:solidFill>
+            <a:srgbClr val="F4F7FA"/>
+          </a:solidFill>
+          <a:ln w="12699">
+            <a:solidFill>
+              <a:srgbClr val="AEBBC7"/>
+            </a:solidFill>
+          </a:ln>
+          <a:effectLst/>
+        </p:spPr>
+        <p:style>
+          <a:lnRef idx="1">
+            <a:schemeClr val="accent1"/>
+          </a:lnRef>
+          <a:fillRef idx="3">
+            <a:schemeClr val="accent1"/>
+          </a:fillRef>
+          <a:effectRef idx="0">
+            <a:schemeClr val="accent1"/>
+          </a:effectRef>
+          <a:fontRef idx="minor">
+            <a:schemeClr val="lt1"/>
+          </a:fontRef>
+        </p:style>
+        <p:txBody>
+          <a:bodyPr rtlCol="0" anchor="ctr"/>
+          <a:lstStyle/>
+          <a:p>
+            <a:pPr algn="ctr"/>
+          </a:p>
+        </p:txBody>
+      </p:sp>
+      <p:sp>
+        <p:nvSpPr>
+          <p:cNvPr id="76" name="ledr_c1_b" descr="Editable shape; source id ledr_c1_b"/>
+          <p:cNvSpPr/>
+          <p:nvPr/>
+        </p:nvSpPr>
+        <p:spPr>
+          <a:xfrm>
+            <a:off x="5048249" y="2484437"/>
+            <a:ext cx="142874" cy="142874"/>
+          </a:xfrm>
+          <a:prstGeom prst="rect">
+            <a:avLst/>
+          </a:prstGeom>
+          <a:noFill/>
+          <a:ln w="18216">
+            <a:solidFill>
+              <a:srgbClr val="111A24"/>
+            </a:solidFill>
+          </a:ln>
+          <a:effectLst/>
+        </p:spPr>
+        <p:style>
+          <a:lnRef idx="1">
+            <a:schemeClr val="accent1"/>
+          </a:lnRef>
+          <a:fillRef idx="3">
+            <a:schemeClr val="accent1"/>
+          </a:fillRef>
+          <a:effectRef idx="0">
+            <a:schemeClr val="accent1"/>
+          </a:effectRef>
+          <a:fontRef idx="minor">
+            <a:schemeClr val="lt1"/>
+          </a:fontRef>
+        </p:style>
+        <p:txBody>
+          <a:bodyPr rtlCol="0" anchor="ctr"/>
+          <a:lstStyle/>
+          <a:p>
+            <a:pPr algn="ctr"/>
+          </a:p>
+        </p:txBody>
+      </p:sp>
+      <p:cxnSp>
+        <p:nvCxnSpPr>
+          <p:cNvPr id="77" name="ledr_c1_k_0" descr="Editable line; source id ledr_c1_k_0"/>
+          <p:cNvCxnSpPr/>
+          <p:nvPr/>
+        </p:nvCxnSpPr>
+        <p:spPr>
+          <a:xfrm>
+            <a:off x="5079999" y="2555874"/>
+            <a:ext cx="31750" cy="31750"/>
+          </a:xfrm>
+          <a:prstGeom prst="line">
+            <a:avLst/>
+          </a:prstGeom>
+          <a:ln w="23681">
+            <a:solidFill>
+              <a:srgbClr val="111A24"/>
+            </a:solidFill>
+          </a:ln>
+          <a:effectLst/>
+        </p:spPr>
+        <p:style>
+          <a:lnRef idx="2">
+            <a:schemeClr val="accent1"/>
+          </a:lnRef>
+          <a:fillRef idx="0">
+            <a:schemeClr val="accent1"/>
+          </a:fillRef>
+          <a:effectRef idx="0">
+            <a:schemeClr val="accent1"/>
+          </a:effectRef>
+          <a:fontRef idx="minor">
+            <a:schemeClr val="tx1"/>
+          </a:fontRef>
+        </p:style>
+      </p:cxnSp>
+      <p:cxnSp>
+        <p:nvCxnSpPr>
+          <p:cNvPr id="78" name="ledr_c1_k_1" descr="Editable line; source id ledr_c1_k_1"/>
+          <p:cNvCxnSpPr/>
+          <p:nvPr/>
+        </p:nvCxnSpPr>
+        <p:spPr>
+          <a:xfrm flipV="1">
+            <a:off x="5111749" y="2524124"/>
+            <a:ext cx="55563" cy="63500"/>
+          </a:xfrm>
+          <a:prstGeom prst="line">
+            <a:avLst/>
+          </a:prstGeom>
+          <a:ln w="23681">
+            <a:solidFill>
+              <a:srgbClr val="111A24"/>
+            </a:solidFill>
+          </a:ln>
+          <a:effectLst/>
+        </p:spPr>
+        <p:style>
+          <a:lnRef idx="2">
+            <a:schemeClr val="accent1"/>
+          </a:lnRef>
+          <a:fillRef idx="0">
+            <a:schemeClr val="accent1"/>
+          </a:fillRef>
+          <a:effectRef idx="0">
+            <a:schemeClr val="accent1"/>
+          </a:effectRef>
+          <a:fontRef idx="minor">
+            <a:schemeClr val="tx1"/>
+          </a:fontRef>
+        </p:style>
+      </p:cxnSp>
+      <p:sp>
+        <p:nvSpPr>
+          <p:cNvPr id="79" name="ledr_x1" descr="Editable text; source id ledr_x1"/>
           <p:cNvSpPr txBox="1"/>
           <p:nvPr/>
         </p:nvSpPr>
         <p:spPr>
           <a:xfrm>
-            <a:off x="301624" y="6254749"/>
-            <a:ext cx="380999" cy="269874"/>
+            <a:off x="5302249" y="2365374"/>
+            <a:ext cx="2158999" cy="388937"/>
           </a:xfrm>
           <a:prstGeom prst="rect">
             <a:avLst/>
@@ -6132,9 +6928,9 @@
           </a:bodyPr>
           <a:lstStyle/>
           <a:p>
-            <a:pPr algn="ctr" fontAlgn="base">
+            <a:pPr algn="l" fontAlgn="base">
               <a:lnSpc>
-                <a:spcPts val="1640"/>
+                <a:spcPts val="2546"/>
               </a:lnSpc>
               <a:spcBef>
                 <a:spcPts val="0"/>
@@ -6142,7 +6938,7 @@
               <a:spcAft>
                 <a:spcPts val="0"/>
               </a:spcAft>
-              <a:defRPr sz="1124" b="1" i="0" lang="zh-CN" dirty="0">
+              <a:defRPr sz="1749" b="0" i="0" lang="zh-CN" dirty="0">
                 <a:solidFill>
                   <a:srgbClr val="27303A"/>
                 </a:solidFill>
@@ -6152,7 +6948,7 @@
               </a:defRPr>
             </a:pPr>
             <a:r>
-              <a:rPr sz="1124" b="1" i="0" lang="zh-CN" dirty="0">
+              <a:rPr sz="1749" b="0" i="0" lang="zh-CN" dirty="0">
                 <a:solidFill>
                   <a:srgbClr val="27303A"/>
                 </a:solidFill>
@@ -6160,21 +6956,185 @@
                 <a:ea typeface="Noto Sans CJK SC"/>
                 <a:cs typeface="Noto Sans CJK SC"/>
               </a:rPr>
-              <a:t>远</a:t>
+              <a:t>热历史</a:t>
             </a:r>
           </a:p>
         </p:txBody>
       </p:sp>
       <p:sp>
         <p:nvSpPr>
-          <p:cNvPr id="61" name="ax_l" descr="Editable text; source id ax_l"/>
+          <p:cNvPr id="80" name="ledr_r2" descr="Editable shape; source id ledr_r2"/>
+          <p:cNvSpPr/>
+          <p:nvPr/>
+        </p:nvSpPr>
+        <p:spPr>
+          <a:xfrm>
+            <a:off x="4937124" y="2817812"/>
+            <a:ext cx="2651124" cy="428624"/>
+          </a:xfrm>
+          <a:prstGeom prst="roundRect">
+            <a:avLst>
+              <a:gd name="adj" fmla="val 11111"/>
+            </a:avLst>
+          </a:prstGeom>
+          <a:solidFill>
+            <a:srgbClr val="F4F7FA"/>
+          </a:solidFill>
+          <a:ln w="12699">
+            <a:solidFill>
+              <a:srgbClr val="AEBBC7"/>
+            </a:solidFill>
+          </a:ln>
+          <a:effectLst/>
+        </p:spPr>
+        <p:style>
+          <a:lnRef idx="1">
+            <a:schemeClr val="accent1"/>
+          </a:lnRef>
+          <a:fillRef idx="3">
+            <a:schemeClr val="accent1"/>
+          </a:fillRef>
+          <a:effectRef idx="0">
+            <a:schemeClr val="accent1"/>
+          </a:effectRef>
+          <a:fontRef idx="minor">
+            <a:schemeClr val="lt1"/>
+          </a:fontRef>
+        </p:style>
+        <p:txBody>
+          <a:bodyPr rtlCol="0" anchor="ctr"/>
+          <a:lstStyle/>
+          <a:p>
+            <a:pPr algn="ctr"/>
+          </a:p>
+        </p:txBody>
+      </p:sp>
+      <p:sp>
+        <p:nvSpPr>
+          <p:cNvPr id="81" name="ledr_c2_b" descr="Editable shape; source id ledr_c2_b"/>
+          <p:cNvSpPr/>
+          <p:nvPr/>
+        </p:nvSpPr>
+        <p:spPr>
+          <a:xfrm>
+            <a:off x="5048249" y="2960687"/>
+            <a:ext cx="142874" cy="142874"/>
+          </a:xfrm>
+          <a:prstGeom prst="rect">
+            <a:avLst/>
+          </a:prstGeom>
+          <a:noFill/>
+          <a:ln w="18216">
+            <a:solidFill>
+              <a:srgbClr val="111A24"/>
+            </a:solidFill>
+          </a:ln>
+          <a:effectLst/>
+        </p:spPr>
+        <p:style>
+          <a:lnRef idx="1">
+            <a:schemeClr val="accent1"/>
+          </a:lnRef>
+          <a:fillRef idx="3">
+            <a:schemeClr val="accent1"/>
+          </a:fillRef>
+          <a:effectRef idx="0">
+            <a:schemeClr val="accent1"/>
+          </a:effectRef>
+          <a:fontRef idx="minor">
+            <a:schemeClr val="lt1"/>
+          </a:fontRef>
+        </p:style>
+        <p:txBody>
+          <a:bodyPr rtlCol="0" anchor="ctr"/>
+          <a:lstStyle/>
+          <a:p>
+            <a:pPr algn="ctr"/>
+          </a:p>
+        </p:txBody>
+      </p:sp>
+      <p:cxnSp>
+        <p:nvCxnSpPr>
+          <p:cNvPr id="82" name="ledr_c2_k_0" descr="Editable line; source id ledr_c2_k_0"/>
+          <p:cNvCxnSpPr/>
+          <p:nvPr/>
+        </p:nvCxnSpPr>
+        <p:spPr>
+          <a:xfrm>
+            <a:off x="5079999" y="3032124"/>
+            <a:ext cx="31750" cy="31750"/>
+          </a:xfrm>
+          <a:prstGeom prst="line">
+            <a:avLst/>
+          </a:prstGeom>
+          <a:ln w="23681">
+            <a:solidFill>
+              <a:srgbClr val="111A24"/>
+            </a:solidFill>
+          </a:ln>
+          <a:effectLst/>
+        </p:spPr>
+        <p:style>
+          <a:lnRef idx="2">
+            <a:schemeClr val="accent1"/>
+          </a:lnRef>
+          <a:fillRef idx="0">
+            <a:schemeClr val="accent1"/>
+          </a:fillRef>
+          <a:effectRef idx="0">
+            <a:schemeClr val="accent1"/>
+          </a:effectRef>
+          <a:fontRef idx="minor">
+            <a:schemeClr val="tx1"/>
+          </a:fontRef>
+        </p:style>
+      </p:cxnSp>
+      <p:cxnSp>
+        <p:nvCxnSpPr>
+          <p:cNvPr id="83" name="ledr_c2_k_1" descr="Editable line; source id ledr_c2_k_1"/>
+          <p:cNvCxnSpPr/>
+          <p:nvPr/>
+        </p:nvCxnSpPr>
+        <p:spPr>
+          <a:xfrm flipV="1">
+            <a:off x="5111749" y="3000374"/>
+            <a:ext cx="55563" cy="63500"/>
+          </a:xfrm>
+          <a:prstGeom prst="line">
+            <a:avLst/>
+          </a:prstGeom>
+          <a:ln w="23681">
+            <a:solidFill>
+              <a:srgbClr val="111A24"/>
+            </a:solidFill>
+          </a:ln>
+          <a:effectLst/>
+        </p:spPr>
+        <p:style>
+          <a:lnRef idx="2">
+            <a:schemeClr val="accent1"/>
+          </a:lnRef>
+          <a:fillRef idx="0">
+            <a:schemeClr val="accent1"/>
+          </a:fillRef>
+          <a:effectRef idx="0">
+            <a:schemeClr val="accent1"/>
+          </a:effectRef>
+          <a:fontRef idx="minor">
+            <a:schemeClr val="tx1"/>
+          </a:fontRef>
+        </p:style>
+      </p:cxnSp>
+      <p:sp>
+        <p:nvSpPr>
+          <p:cNvPr id="84" name="ledr_x2" descr="Editable text; source id ledr_x2"/>
           <p:cNvSpPr txBox="1"/>
           <p:nvPr/>
         </p:nvSpPr>
         <p:spPr>
-          <a:xfrm rot="16200000">
-            <a:off x="-261937" y="3698874"/>
-            <a:ext cx="1190624" cy="246062"/>
+          <a:xfrm>
+            <a:off x="5302249" y="2841624"/>
+            <a:ext cx="2158999" cy="388937"/>
           </a:xfrm>
           <a:prstGeom prst="rect">
             <a:avLst/>
@@ -6188,9 +7148,9 @@
           </a:bodyPr>
           <a:lstStyle/>
           <a:p>
-            <a:pPr algn="ctr" fontAlgn="base">
+            <a:pPr algn="l" fontAlgn="base">
               <a:lnSpc>
-                <a:spcPts val="1640"/>
+                <a:spcPts val="2546"/>
               </a:lnSpc>
               <a:spcBef>
                 <a:spcPts val="0"/>
@@ -6198,7 +7158,7 @@
               <a:spcAft>
                 <a:spcPts val="0"/>
               </a:spcAft>
-              <a:defRPr sz="1124" b="1" i="0" lang="zh-CN" dirty="0">
+              <a:defRPr sz="1749" b="0" i="0" lang="zh-CN" dirty="0">
                 <a:solidFill>
                   <a:srgbClr val="27303A"/>
                 </a:solidFill>
@@ -6208,7 +7168,7 @@
               </a:defRPr>
             </a:pPr>
             <a:r>
-              <a:rPr sz="1124" b="1" i="0" lang="zh-CN" dirty="0">
+              <a:rPr sz="1749" b="0" i="0" lang="zh-CN" dirty="0">
                 <a:solidFill>
                   <a:srgbClr val="27303A"/>
                 </a:solidFill>
@@ -6216,33 +7176,33 @@
                 <a:ea typeface="Noto Sans CJK SC"/>
                 <a:cs typeface="Noto Sans CJK SC"/>
               </a:rPr>
-              <a:t>与目标相的距离</a:t>
+              <a:t>气氛</a:t>
             </a:r>
           </a:p>
         </p:txBody>
       </p:sp>
       <p:sp>
         <p:nvSpPr>
-          <p:cNvPr id="62" name="led" descr="Editable shape; source id led"/>
+          <p:cNvPr id="85" name="ledr_r3" descr="Editable shape; source id ledr_r3"/>
           <p:cNvSpPr/>
           <p:nvPr/>
         </p:nvSpPr>
         <p:spPr>
           <a:xfrm>
-            <a:off x="4921249" y="1190624"/>
-            <a:ext cx="3032124" cy="4286249"/>
+            <a:off x="4937124" y="3294062"/>
+            <a:ext cx="2651124" cy="428624"/>
           </a:xfrm>
           <a:prstGeom prst="roundRect">
             <a:avLst>
-              <a:gd name="adj" fmla="val 2356"/>
+              <a:gd name="adj" fmla="val 11111"/>
             </a:avLst>
           </a:prstGeom>
           <a:solidFill>
-            <a:srgbClr val="FFFFFF"/>
+            <a:srgbClr val="F4F7FA"/>
           </a:solidFill>
-          <a:ln w="15081">
+          <a:ln w="12699">
             <a:solidFill>
-              <a:srgbClr val="1F7F8C"/>
+              <a:srgbClr val="AEBBC7"/>
             </a:solidFill>
           </a:ln>
           <a:effectLst/>
@@ -6271,60 +7231,14 @@
       </p:sp>
       <p:sp>
         <p:nvSpPr>
-          <p:cNvPr id="63" name="led_b" descr="Editable shape; source id led_b"/>
+          <p:cNvPr id="86" name="ledr_c3_b" descr="Editable shape; source id ledr_c3_b"/>
           <p:cNvSpPr/>
           <p:nvPr/>
         </p:nvSpPr>
         <p:spPr>
           <a:xfrm>
-            <a:off x="4921249" y="1190624"/>
-            <a:ext cx="87312" cy="4286249"/>
-          </a:xfrm>
-          <a:prstGeom prst="roundRect">
-            <a:avLst>
-              <a:gd name="adj" fmla="val 27272"/>
-            </a:avLst>
-          </a:prstGeom>
-          <a:solidFill>
-            <a:srgbClr val="1F7F8C"/>
-          </a:solidFill>
-          <a:ln>
-            <a:noFill/>
-          </a:ln>
-          <a:effectLst/>
-        </p:spPr>
-        <p:style>
-          <a:lnRef idx="1">
-            <a:schemeClr val="accent1"/>
-          </a:lnRef>
-          <a:fillRef idx="3">
-            <a:schemeClr val="accent1"/>
-          </a:fillRef>
-          <a:effectRef idx="0">
-            <a:schemeClr val="accent1"/>
-          </a:effectRef>
-          <a:fontRef idx="minor">
-            <a:schemeClr val="lt1"/>
-          </a:fontRef>
-        </p:style>
-        <p:txBody>
-          <a:bodyPr rtlCol="0" anchor="ctr"/>
-          <a:lstStyle/>
-          <a:p>
-            <a:pPr algn="ctr"/>
-          </a:p>
-        </p:txBody>
-      </p:sp>
-      <p:sp>
-        <p:nvSpPr>
-          <p:cNvPr id="64" name="led_g_b" descr="Editable shape; source id led_g_b"/>
-          <p:cNvSpPr/>
-          <p:nvPr/>
-        </p:nvSpPr>
-        <p:spPr>
-          <a:xfrm>
-            <a:off x="5183187" y="1476374"/>
-            <a:ext cx="261937" cy="230187"/>
+            <a:off x="5048249" y="3436937"/>
+            <a:ext cx="142874" cy="142874"/>
           </a:xfrm>
           <a:prstGeom prst="rect">
             <a:avLst/>
@@ -6361,19 +7275,19 @@
       </p:sp>
       <p:cxnSp>
         <p:nvCxnSpPr>
-          <p:cNvPr id="65" name="led_g_r1" descr="Editable line; source id led_g_r1"/>
+          <p:cNvPr id="87" name="ledr_c3_k_0" descr="Editable line; source id ledr_c3_k_0"/>
           <p:cNvCxnSpPr/>
           <p:nvPr/>
         </p:nvCxnSpPr>
         <p:spPr>
           <a:xfrm>
-            <a:off x="5183187" y="1555749"/>
-            <a:ext cx="269875" cy="0"/>
+            <a:off x="5079999" y="3508374"/>
+            <a:ext cx="31750" cy="31750"/>
           </a:xfrm>
           <a:prstGeom prst="line">
             <a:avLst/>
           </a:prstGeom>
-          <a:ln w="18216">
+          <a:ln w="23681">
             <a:solidFill>
               <a:srgbClr val="111A24"/>
             </a:solidFill>
@@ -6397,19 +7311,19 @@
       </p:cxnSp>
       <p:cxnSp>
         <p:nvCxnSpPr>
-          <p:cNvPr id="66" name="led_g_r2" descr="Editable line; source id led_g_r2"/>
+          <p:cNvPr id="88" name="ledr_c3_k_1" descr="Editable line; source id ledr_c3_k_1"/>
           <p:cNvCxnSpPr/>
           <p:nvPr/>
         </p:nvCxnSpPr>
         <p:spPr>
-          <a:xfrm>
-            <a:off x="5183187" y="1627187"/>
-            <a:ext cx="269875" cy="0"/>
+          <a:xfrm flipV="1">
+            <a:off x="5111749" y="3476624"/>
+            <a:ext cx="55563" cy="63500"/>
           </a:xfrm>
           <a:prstGeom prst="line">
             <a:avLst/>
           </a:prstGeom>
-          <a:ln w="18216">
+          <a:ln w="23681">
             <a:solidFill>
               <a:srgbClr val="111A24"/>
             </a:solidFill>
@@ -6431,88 +7345,16 @@
           </a:fontRef>
         </p:style>
       </p:cxnSp>
-      <p:cxnSp>
-        <p:nvCxnSpPr>
-          <p:cNvPr id="67" name="led_g_c1" descr="Editable line; source id led_g_c1"/>
-          <p:cNvCxnSpPr/>
-          <p:nvPr/>
-        </p:nvCxnSpPr>
-        <p:spPr>
-          <a:xfrm>
-            <a:off x="5270499" y="1476374"/>
-            <a:ext cx="0" cy="230188"/>
-          </a:xfrm>
-          <a:prstGeom prst="line">
-            <a:avLst/>
-          </a:prstGeom>
-          <a:ln w="18216">
-            <a:solidFill>
-              <a:srgbClr val="111A24"/>
-            </a:solidFill>
-          </a:ln>
-          <a:effectLst/>
-        </p:spPr>
-        <p:style>
-          <a:lnRef idx="2">
-            <a:schemeClr val="accent1"/>
-          </a:lnRef>
-          <a:fillRef idx="0">
-            <a:schemeClr val="accent1"/>
-          </a:fillRef>
-          <a:effectRef idx="0">
-            <a:schemeClr val="accent1"/>
-          </a:effectRef>
-          <a:fontRef idx="minor">
-            <a:schemeClr val="tx1"/>
-          </a:fontRef>
-        </p:style>
-      </p:cxnSp>
-      <p:cxnSp>
-        <p:nvCxnSpPr>
-          <p:cNvPr id="68" name="led_g_c2" descr="Editable line; source id led_g_c2"/>
-          <p:cNvCxnSpPr/>
-          <p:nvPr/>
-        </p:nvCxnSpPr>
-        <p:spPr>
-          <a:xfrm>
-            <a:off x="5365749" y="1476374"/>
-            <a:ext cx="0" cy="230188"/>
-          </a:xfrm>
-          <a:prstGeom prst="line">
-            <a:avLst/>
-          </a:prstGeom>
-          <a:ln w="18216">
-            <a:solidFill>
-              <a:srgbClr val="111A24"/>
-            </a:solidFill>
-          </a:ln>
-          <a:effectLst/>
-        </p:spPr>
-        <p:style>
-          <a:lnRef idx="2">
-            <a:schemeClr val="accent1"/>
-          </a:lnRef>
-          <a:fillRef idx="0">
-            <a:schemeClr val="accent1"/>
-          </a:fillRef>
-          <a:effectRef idx="0">
-            <a:schemeClr val="accent1"/>
-          </a:effectRef>
-          <a:fontRef idx="minor">
-            <a:schemeClr val="tx1"/>
-          </a:fontRef>
-        </p:style>
-      </p:cxnSp>
-      <p:sp>
-        <p:nvSpPr>
-          <p:cNvPr id="69" name="led_t" descr="Editable text; source id led_t"/>
+      <p:sp>
+        <p:nvSpPr>
+          <p:cNvPr id="89" name="ledr_x3" descr="Editable text; source id ledr_x3"/>
           <p:cNvSpPr txBox="1"/>
           <p:nvPr/>
         </p:nvSpPr>
         <p:spPr>
           <a:xfrm>
-            <a:off x="5587999" y="1412874"/>
-            <a:ext cx="2238374" cy="349249"/>
+            <a:off x="5302249" y="3317874"/>
+            <a:ext cx="2158999" cy="388937"/>
           </a:xfrm>
           <a:prstGeom prst="rect">
             <a:avLst/>
@@ -6528,7 +7370,7 @@
           <a:p>
             <a:pPr algn="l" fontAlgn="base">
               <a:lnSpc>
-                <a:spcPts val="2265"/>
+                <a:spcPts val="2546"/>
               </a:lnSpc>
               <a:spcBef>
                 <a:spcPts val="0"/>
@@ -6536,227 +7378,7 @@
               <a:spcAft>
                 <a:spcPts val="0"/>
               </a:spcAft>
-              <a:defRPr sz="1562" b="1" i="0" lang="zh-CN" dirty="0">
-                <a:solidFill>
-                  <a:srgbClr val="0F4F58"/>
-                </a:solidFill>
-                <a:latin typeface="Noto Sans CJK SC"/>
-                <a:ea typeface="Noto Sans CJK SC"/>
-                <a:cs typeface="Noto Sans CJK SC"/>
-              </a:defRPr>
-            </a:pPr>
-            <a:r>
-              <a:rPr sz="1562" b="1" i="0" lang="zh-CN" dirty="0">
-                <a:solidFill>
-                  <a:srgbClr val="0F4F58"/>
-                </a:solidFill>
-                <a:latin typeface="Noto Sans CJK SC"/>
-                <a:ea typeface="Noto Sans CJK SC"/>
-                <a:cs typeface="Noto Sans CJK SC"/>
-              </a:rPr>
-              <a:t>相同实验项目下比较</a:t>
-            </a:r>
-          </a:p>
-        </p:txBody>
-      </p:sp>
-      <p:sp>
-        <p:nvSpPr>
-          <p:cNvPr id="70" name="ledr_r0" descr="Editable shape; source id ledr_r0"/>
-          <p:cNvSpPr/>
-          <p:nvPr/>
-        </p:nvSpPr>
-        <p:spPr>
-          <a:xfrm>
-            <a:off x="5143499" y="1968499"/>
-            <a:ext cx="2619374" cy="484187"/>
-          </a:xfrm>
-          <a:prstGeom prst="roundRect">
-            <a:avLst>
-              <a:gd name="adj" fmla="val 9836"/>
-            </a:avLst>
-          </a:prstGeom>
-          <a:solidFill>
-            <a:srgbClr val="F4F7FA"/>
-          </a:solidFill>
-          <a:ln w="12699">
-            <a:solidFill>
-              <a:srgbClr val="AEBBC7"/>
-            </a:solidFill>
-          </a:ln>
-          <a:effectLst/>
-        </p:spPr>
-        <p:style>
-          <a:lnRef idx="1">
-            <a:schemeClr val="accent1"/>
-          </a:lnRef>
-          <a:fillRef idx="3">
-            <a:schemeClr val="accent1"/>
-          </a:fillRef>
-          <a:effectRef idx="0">
-            <a:schemeClr val="accent1"/>
-          </a:effectRef>
-          <a:fontRef idx="minor">
-            <a:schemeClr val="lt1"/>
-          </a:fontRef>
-        </p:style>
-        <p:txBody>
-          <a:bodyPr rtlCol="0" anchor="ctr"/>
-          <a:lstStyle/>
-          <a:p>
-            <a:pPr algn="ctr"/>
-          </a:p>
-        </p:txBody>
-      </p:sp>
-      <p:sp>
-        <p:nvSpPr>
-          <p:cNvPr id="71" name="ledr_c0_b" descr="Editable shape; source id ledr_c0_b"/>
-          <p:cNvSpPr/>
-          <p:nvPr/>
-        </p:nvSpPr>
-        <p:spPr>
-          <a:xfrm>
-            <a:off x="5254624" y="2135187"/>
-            <a:ext cx="142874" cy="142874"/>
-          </a:xfrm>
-          <a:prstGeom prst="rect">
-            <a:avLst/>
-          </a:prstGeom>
-          <a:noFill/>
-          <a:ln w="18216">
-            <a:solidFill>
-              <a:srgbClr val="111A24"/>
-            </a:solidFill>
-          </a:ln>
-          <a:effectLst/>
-        </p:spPr>
-        <p:style>
-          <a:lnRef idx="1">
-            <a:schemeClr val="accent1"/>
-          </a:lnRef>
-          <a:fillRef idx="3">
-            <a:schemeClr val="accent1"/>
-          </a:fillRef>
-          <a:effectRef idx="0">
-            <a:schemeClr val="accent1"/>
-          </a:effectRef>
-          <a:fontRef idx="minor">
-            <a:schemeClr val="lt1"/>
-          </a:fontRef>
-        </p:style>
-        <p:txBody>
-          <a:bodyPr rtlCol="0" anchor="ctr"/>
-          <a:lstStyle/>
-          <a:p>
-            <a:pPr algn="ctr"/>
-          </a:p>
-        </p:txBody>
-      </p:sp>
-      <p:cxnSp>
-        <p:nvCxnSpPr>
-          <p:cNvPr id="72" name="ledr_c0_k_0" descr="Editable line; source id ledr_c0_k_0"/>
-          <p:cNvCxnSpPr/>
-          <p:nvPr/>
-        </p:nvCxnSpPr>
-        <p:spPr>
-          <a:xfrm>
-            <a:off x="5286374" y="2214562"/>
-            <a:ext cx="31750" cy="31750"/>
-          </a:xfrm>
-          <a:prstGeom prst="line">
-            <a:avLst/>
-          </a:prstGeom>
-          <a:ln w="23681">
-            <a:solidFill>
-              <a:srgbClr val="111A24"/>
-            </a:solidFill>
-          </a:ln>
-          <a:effectLst/>
-        </p:spPr>
-        <p:style>
-          <a:lnRef idx="2">
-            <a:schemeClr val="accent1"/>
-          </a:lnRef>
-          <a:fillRef idx="0">
-            <a:schemeClr val="accent1"/>
-          </a:fillRef>
-          <a:effectRef idx="0">
-            <a:schemeClr val="accent1"/>
-          </a:effectRef>
-          <a:fontRef idx="minor">
-            <a:schemeClr val="tx1"/>
-          </a:fontRef>
-        </p:style>
-      </p:cxnSp>
-      <p:cxnSp>
-        <p:nvCxnSpPr>
-          <p:cNvPr id="73" name="ledr_c0_k_1" descr="Editable line; source id ledr_c0_k_1"/>
-          <p:cNvCxnSpPr/>
-          <p:nvPr/>
-        </p:nvCxnSpPr>
-        <p:spPr>
-          <a:xfrm flipV="1">
-            <a:off x="5318124" y="2174874"/>
-            <a:ext cx="55563" cy="71438"/>
-          </a:xfrm>
-          <a:prstGeom prst="line">
-            <a:avLst/>
-          </a:prstGeom>
-          <a:ln w="23681">
-            <a:solidFill>
-              <a:srgbClr val="111A24"/>
-            </a:solidFill>
-          </a:ln>
-          <a:effectLst/>
-        </p:spPr>
-        <p:style>
-          <a:lnRef idx="2">
-            <a:schemeClr val="accent1"/>
-          </a:lnRef>
-          <a:fillRef idx="0">
-            <a:schemeClr val="accent1"/>
-          </a:fillRef>
-          <a:effectRef idx="0">
-            <a:schemeClr val="accent1"/>
-          </a:effectRef>
-          <a:fontRef idx="minor">
-            <a:schemeClr val="tx1"/>
-          </a:fontRef>
-        </p:style>
-      </p:cxnSp>
-      <p:sp>
-        <p:nvSpPr>
-          <p:cNvPr id="74" name="ledr_x0" descr="Editable text; source id ledr_x0"/>
-          <p:cNvSpPr txBox="1"/>
-          <p:nvPr/>
-        </p:nvSpPr>
-        <p:spPr>
-          <a:xfrm>
-            <a:off x="5508624" y="2071687"/>
-            <a:ext cx="2127249" cy="277812"/>
-          </a:xfrm>
-          <a:prstGeom prst="rect">
-            <a:avLst/>
-          </a:prstGeom>
-          <a:noFill/>
-          <a:effectLst/>
-        </p:spPr>
-        <p:txBody>
-          <a:bodyPr wrap="none" anchor="ctr" tIns="0" rIns="0" bIns="0" lIns="0" anchorCtr="0" vertOverflow="overflow">
-            <a:noAutofit/>
-          </a:bodyPr>
-          <a:lstStyle/>
-          <a:p>
-            <a:pPr algn="l" fontAlgn="base">
-              <a:lnSpc>
-                <a:spcPts val="1828"/>
-              </a:lnSpc>
-              <a:spcBef>
-                <a:spcPts val="0"/>
-              </a:spcBef>
-              <a:spcAft>
-                <a:spcPts val="0"/>
-              </a:spcAft>
-              <a:defRPr sz="1249" b="1" i="0" lang="zh-CN" dirty="0">
+              <a:defRPr sz="1749" b="0" i="0" lang="zh-CN" dirty="0">
                 <a:solidFill>
                   <a:srgbClr val="27303A"/>
                 </a:solidFill>
@@ -6766,7 +7388,7 @@
               </a:defRPr>
             </a:pPr>
             <a:r>
-              <a:rPr sz="1249" b="1" i="0" lang="zh-CN" dirty="0">
+              <a:rPr sz="1749" b="0" i="0" lang="zh-CN" dirty="0">
                 <a:solidFill>
                   <a:srgbClr val="27303A"/>
                 </a:solidFill>
@@ -6774,25 +7396,25 @@
                 <a:ea typeface="Noto Sans CJK SC"/>
                 <a:cs typeface="Noto Sans CJK SC"/>
               </a:rPr>
-              <a:t>原料与配比</a:t>
+              <a:t>容器与助熔剂</a:t>
             </a:r>
           </a:p>
         </p:txBody>
       </p:sp>
       <p:sp>
         <p:nvSpPr>
-          <p:cNvPr id="75" name="ledr_r1" descr="Editable shape; source id ledr_r1"/>
+          <p:cNvPr id="90" name="ledr_r4" descr="Editable shape; source id ledr_r4"/>
           <p:cNvSpPr/>
           <p:nvPr/>
         </p:nvSpPr>
         <p:spPr>
           <a:xfrm>
-            <a:off x="5143499" y="2532062"/>
-            <a:ext cx="2619374" cy="484187"/>
+            <a:off x="4937124" y="3770312"/>
+            <a:ext cx="2651124" cy="428624"/>
           </a:xfrm>
           <a:prstGeom prst="roundRect">
             <a:avLst>
-              <a:gd name="adj" fmla="val 9836"/>
+              <a:gd name="adj" fmla="val 11111"/>
             </a:avLst>
           </a:prstGeom>
           <a:solidFill>
@@ -6829,13 +7451,13 @@
       </p:sp>
       <p:sp>
         <p:nvSpPr>
-          <p:cNvPr id="76" name="ledr_c1_b" descr="Editable shape; source id ledr_c1_b"/>
+          <p:cNvPr id="91" name="ledr_c4_b" descr="Editable shape; source id ledr_c4_b"/>
           <p:cNvSpPr/>
           <p:nvPr/>
         </p:nvSpPr>
         <p:spPr>
           <a:xfrm>
-            <a:off x="5254624" y="2698749"/>
+            <a:off x="5048249" y="3913187"/>
             <a:ext cx="142874" cy="142874"/>
           </a:xfrm>
           <a:prstGeom prst="rect">
@@ -6873,13 +7495,13 @@
       </p:sp>
       <p:cxnSp>
         <p:nvCxnSpPr>
-          <p:cNvPr id="77" name="ledr_c1_k_0" descr="Editable line; source id ledr_c1_k_0"/>
+          <p:cNvPr id="92" name="ledr_c4_k_0" descr="Editable line; source id ledr_c4_k_0"/>
           <p:cNvCxnSpPr/>
           <p:nvPr/>
         </p:nvCxnSpPr>
         <p:spPr>
           <a:xfrm>
-            <a:off x="5286374" y="2770187"/>
+            <a:off x="5079999" y="3984624"/>
             <a:ext cx="31750" cy="31750"/>
           </a:xfrm>
           <a:prstGeom prst="line">
@@ -6909,13 +7531,13 @@
       </p:cxnSp>
       <p:cxnSp>
         <p:nvCxnSpPr>
-          <p:cNvPr id="78" name="ledr_c1_k_1" descr="Editable line; source id ledr_c1_k_1"/>
+          <p:cNvPr id="93" name="ledr_c4_k_1" descr="Editable line; source id ledr_c4_k_1"/>
           <p:cNvCxnSpPr/>
           <p:nvPr/>
         </p:nvCxnSpPr>
         <p:spPr>
           <a:xfrm flipV="1">
-            <a:off x="5318124" y="2738437"/>
+            <a:off x="5111749" y="3952874"/>
             <a:ext cx="55563" cy="63500"/>
           </a:xfrm>
           <a:prstGeom prst="line">
@@ -6945,14 +7567,14 @@
       </p:cxnSp>
       <p:sp>
         <p:nvSpPr>
-          <p:cNvPr id="79" name="ledr_x1" descr="Editable text; source id ledr_x1"/>
+          <p:cNvPr id="94" name="ledr_x4" descr="Editable text; source id ledr_x4"/>
           <p:cNvSpPr txBox="1"/>
           <p:nvPr/>
         </p:nvSpPr>
         <p:spPr>
           <a:xfrm>
-            <a:off x="5508624" y="2627312"/>
-            <a:ext cx="2127249" cy="277812"/>
+            <a:off x="5302249" y="3794124"/>
+            <a:ext cx="2158999" cy="388937"/>
           </a:xfrm>
           <a:prstGeom prst="rect">
             <a:avLst/>
@@ -6968,7 +7590,7 @@
           <a:p>
             <a:pPr algn="l" fontAlgn="base">
               <a:lnSpc>
-                <a:spcPts val="1828"/>
+                <a:spcPts val="2546"/>
               </a:lnSpc>
               <a:spcBef>
                 <a:spcPts val="0"/>
@@ -6976,7 +7598,7 @@
               <a:spcAft>
                 <a:spcPts val="0"/>
               </a:spcAft>
-              <a:defRPr sz="1249" b="1" i="0" lang="zh-CN" dirty="0">
+              <a:defRPr sz="1749" b="0" i="0" lang="zh-CN" dirty="0">
                 <a:solidFill>
                   <a:srgbClr val="27303A"/>
                 </a:solidFill>
@@ -6986,7 +7608,7 @@
               </a:defRPr>
             </a:pPr>
             <a:r>
-              <a:rPr sz="1249" b="1" i="0" lang="zh-CN" dirty="0">
+              <a:rPr sz="1749" b="0" i="0" lang="zh-CN" dirty="0">
                 <a:solidFill>
                   <a:srgbClr val="27303A"/>
                 </a:solidFill>
@@ -6994,25 +7616,25 @@
                 <a:ea typeface="Noto Sans CJK SC"/>
                 <a:cs typeface="Noto Sans CJK SC"/>
               </a:rPr>
-              <a:t>热历史</a:t>
+              <a:t>冷却与分离</a:t>
             </a:r>
           </a:p>
         </p:txBody>
       </p:sp>
       <p:sp>
         <p:nvSpPr>
-          <p:cNvPr id="80" name="ledr_r2" descr="Editable shape; source id ledr_r2"/>
+          <p:cNvPr id="95" name="ledr_r5" descr="Editable shape; source id ledr_r5"/>
           <p:cNvSpPr/>
           <p:nvPr/>
         </p:nvSpPr>
         <p:spPr>
           <a:xfrm>
-            <a:off x="5143499" y="3087687"/>
-            <a:ext cx="2619374" cy="484187"/>
+            <a:off x="4937124" y="4246562"/>
+            <a:ext cx="2651124" cy="428624"/>
           </a:xfrm>
           <a:prstGeom prst="roundRect">
             <a:avLst>
-              <a:gd name="adj" fmla="val 9836"/>
+              <a:gd name="adj" fmla="val 11111"/>
             </a:avLst>
           </a:prstGeom>
           <a:solidFill>
@@ -7049,13 +7671,13 @@
       </p:sp>
       <p:sp>
         <p:nvSpPr>
-          <p:cNvPr id="81" name="ledr_c2_b" descr="Editable shape; source id ledr_c2_b"/>
+          <p:cNvPr id="96" name="ledr_c5_b" descr="Editable shape; source id ledr_c5_b"/>
           <p:cNvSpPr/>
           <p:nvPr/>
         </p:nvSpPr>
         <p:spPr>
           <a:xfrm>
-            <a:off x="5254624" y="3254374"/>
+            <a:off x="5048249" y="4389437"/>
             <a:ext cx="142874" cy="142874"/>
           </a:xfrm>
           <a:prstGeom prst="rect">
@@ -7093,13 +7715,13 @@
       </p:sp>
       <p:cxnSp>
         <p:nvCxnSpPr>
-          <p:cNvPr id="82" name="ledr_c2_k_0" descr="Editable line; source id ledr_c2_k_0"/>
+          <p:cNvPr id="97" name="ledr_c5_k_0" descr="Editable line; source id ledr_c5_k_0"/>
           <p:cNvCxnSpPr/>
           <p:nvPr/>
         </p:nvCxnSpPr>
         <p:spPr>
           <a:xfrm>
-            <a:off x="5286374" y="3333749"/>
+            <a:off x="5079999" y="4460874"/>
             <a:ext cx="31750" cy="31750"/>
           </a:xfrm>
           <a:prstGeom prst="line">
@@ -7129,14 +7751,14 @@
       </p:cxnSp>
       <p:cxnSp>
         <p:nvCxnSpPr>
-          <p:cNvPr id="83" name="ledr_c2_k_1" descr="Editable line; source id ledr_c2_k_1"/>
+          <p:cNvPr id="98" name="ledr_c5_k_1" descr="Editable line; source id ledr_c5_k_1"/>
           <p:cNvCxnSpPr/>
           <p:nvPr/>
         </p:nvCxnSpPr>
         <p:spPr>
           <a:xfrm flipV="1">
-            <a:off x="5318124" y="3294062"/>
-            <a:ext cx="55563" cy="71437"/>
+            <a:off x="5111749" y="4429124"/>
+            <a:ext cx="55563" cy="63500"/>
           </a:xfrm>
           <a:prstGeom prst="line">
             <a:avLst/>
@@ -7165,14 +7787,14 @@
       </p:cxnSp>
       <p:sp>
         <p:nvSpPr>
-          <p:cNvPr id="84" name="ledr_x2" descr="Editable text; source id ledr_x2"/>
+          <p:cNvPr id="99" name="ledr_x5" descr="Editable text; source id ledr_x5"/>
           <p:cNvSpPr txBox="1"/>
           <p:nvPr/>
         </p:nvSpPr>
         <p:spPr>
           <a:xfrm>
-            <a:off x="5508624" y="3190874"/>
-            <a:ext cx="2127249" cy="277812"/>
+            <a:off x="5302249" y="4270374"/>
+            <a:ext cx="2158999" cy="388937"/>
           </a:xfrm>
           <a:prstGeom prst="rect">
             <a:avLst/>
@@ -7188,7 +7810,7 @@
           <a:p>
             <a:pPr algn="l" fontAlgn="base">
               <a:lnSpc>
-                <a:spcPts val="1828"/>
+                <a:spcPts val="2546"/>
               </a:lnSpc>
               <a:spcBef>
                 <a:spcPts val="0"/>
@@ -7196,7 +7818,7 @@
               <a:spcAft>
                 <a:spcPts val="0"/>
               </a:spcAft>
-              <a:defRPr sz="1249" b="1" i="0" lang="zh-CN" dirty="0">
+              <a:defRPr sz="1749" b="0" i="0" lang="zh-CN" dirty="0">
                 <a:solidFill>
                   <a:srgbClr val="27303A"/>
                 </a:solidFill>
@@ -7206,667 +7828,7 @@
               </a:defRPr>
             </a:pPr>
             <a:r>
-              <a:rPr sz="1249" b="1" i="0" lang="zh-CN" dirty="0">
-                <a:solidFill>
-                  <a:srgbClr val="27303A"/>
-                </a:solidFill>
-                <a:latin typeface="Noto Sans CJK SC"/>
-                <a:ea typeface="Noto Sans CJK SC"/>
-                <a:cs typeface="Noto Sans CJK SC"/>
-              </a:rPr>
-              <a:t>气氛</a:t>
-            </a:r>
-          </a:p>
-        </p:txBody>
-      </p:sp>
-      <p:sp>
-        <p:nvSpPr>
-          <p:cNvPr id="85" name="ledr_r3" descr="Editable shape; source id ledr_r3"/>
-          <p:cNvSpPr/>
-          <p:nvPr/>
-        </p:nvSpPr>
-        <p:spPr>
-          <a:xfrm>
-            <a:off x="5143499" y="3651249"/>
-            <a:ext cx="2619374" cy="484187"/>
-          </a:xfrm>
-          <a:prstGeom prst="roundRect">
-            <a:avLst>
-              <a:gd name="adj" fmla="val 9836"/>
-            </a:avLst>
-          </a:prstGeom>
-          <a:solidFill>
-            <a:srgbClr val="F4F7FA"/>
-          </a:solidFill>
-          <a:ln w="12699">
-            <a:solidFill>
-              <a:srgbClr val="AEBBC7"/>
-            </a:solidFill>
-          </a:ln>
-          <a:effectLst/>
-        </p:spPr>
-        <p:style>
-          <a:lnRef idx="1">
-            <a:schemeClr val="accent1"/>
-          </a:lnRef>
-          <a:fillRef idx="3">
-            <a:schemeClr val="accent1"/>
-          </a:fillRef>
-          <a:effectRef idx="0">
-            <a:schemeClr val="accent1"/>
-          </a:effectRef>
-          <a:fontRef idx="minor">
-            <a:schemeClr val="lt1"/>
-          </a:fontRef>
-        </p:style>
-        <p:txBody>
-          <a:bodyPr rtlCol="0" anchor="ctr"/>
-          <a:lstStyle/>
-          <a:p>
-            <a:pPr algn="ctr"/>
-          </a:p>
-        </p:txBody>
-      </p:sp>
-      <p:sp>
-        <p:nvSpPr>
-          <p:cNvPr id="86" name="ledr_c3_b" descr="Editable shape; source id ledr_c3_b"/>
-          <p:cNvSpPr/>
-          <p:nvPr/>
-        </p:nvSpPr>
-        <p:spPr>
-          <a:xfrm>
-            <a:off x="5254624" y="3817937"/>
-            <a:ext cx="142874" cy="142874"/>
-          </a:xfrm>
-          <a:prstGeom prst="rect">
-            <a:avLst/>
-          </a:prstGeom>
-          <a:noFill/>
-          <a:ln w="18216">
-            <a:solidFill>
-              <a:srgbClr val="111A24"/>
-            </a:solidFill>
-          </a:ln>
-          <a:effectLst/>
-        </p:spPr>
-        <p:style>
-          <a:lnRef idx="1">
-            <a:schemeClr val="accent1"/>
-          </a:lnRef>
-          <a:fillRef idx="3">
-            <a:schemeClr val="accent1"/>
-          </a:fillRef>
-          <a:effectRef idx="0">
-            <a:schemeClr val="accent1"/>
-          </a:effectRef>
-          <a:fontRef idx="minor">
-            <a:schemeClr val="lt1"/>
-          </a:fontRef>
-        </p:style>
-        <p:txBody>
-          <a:bodyPr rtlCol="0" anchor="ctr"/>
-          <a:lstStyle/>
-          <a:p>
-            <a:pPr algn="ctr"/>
-          </a:p>
-        </p:txBody>
-      </p:sp>
-      <p:cxnSp>
-        <p:nvCxnSpPr>
-          <p:cNvPr id="87" name="ledr_c3_k_0" descr="Editable line; source id ledr_c3_k_0"/>
-          <p:cNvCxnSpPr/>
-          <p:nvPr/>
-        </p:nvCxnSpPr>
-        <p:spPr>
-          <a:xfrm>
-            <a:off x="5286374" y="3897312"/>
-            <a:ext cx="31750" cy="31750"/>
-          </a:xfrm>
-          <a:prstGeom prst="line">
-            <a:avLst/>
-          </a:prstGeom>
-          <a:ln w="23681">
-            <a:solidFill>
-              <a:srgbClr val="111A24"/>
-            </a:solidFill>
-          </a:ln>
-          <a:effectLst/>
-        </p:spPr>
-        <p:style>
-          <a:lnRef idx="2">
-            <a:schemeClr val="accent1"/>
-          </a:lnRef>
-          <a:fillRef idx="0">
-            <a:schemeClr val="accent1"/>
-          </a:fillRef>
-          <a:effectRef idx="0">
-            <a:schemeClr val="accent1"/>
-          </a:effectRef>
-          <a:fontRef idx="minor">
-            <a:schemeClr val="tx1"/>
-          </a:fontRef>
-        </p:style>
-      </p:cxnSp>
-      <p:cxnSp>
-        <p:nvCxnSpPr>
-          <p:cNvPr id="88" name="ledr_c3_k_1" descr="Editable line; source id ledr_c3_k_1"/>
-          <p:cNvCxnSpPr/>
-          <p:nvPr/>
-        </p:nvCxnSpPr>
-        <p:spPr>
-          <a:xfrm flipV="1">
-            <a:off x="5318124" y="3857624"/>
-            <a:ext cx="55563" cy="71438"/>
-          </a:xfrm>
-          <a:prstGeom prst="line">
-            <a:avLst/>
-          </a:prstGeom>
-          <a:ln w="23681">
-            <a:solidFill>
-              <a:srgbClr val="111A24"/>
-            </a:solidFill>
-          </a:ln>
-          <a:effectLst/>
-        </p:spPr>
-        <p:style>
-          <a:lnRef idx="2">
-            <a:schemeClr val="accent1"/>
-          </a:lnRef>
-          <a:fillRef idx="0">
-            <a:schemeClr val="accent1"/>
-          </a:fillRef>
-          <a:effectRef idx="0">
-            <a:schemeClr val="accent1"/>
-          </a:effectRef>
-          <a:fontRef idx="minor">
-            <a:schemeClr val="tx1"/>
-          </a:fontRef>
-        </p:style>
-      </p:cxnSp>
-      <p:sp>
-        <p:nvSpPr>
-          <p:cNvPr id="89" name="ledr_x3" descr="Editable text; source id ledr_x3"/>
-          <p:cNvSpPr txBox="1"/>
-          <p:nvPr/>
-        </p:nvSpPr>
-        <p:spPr>
-          <a:xfrm>
-            <a:off x="5508624" y="3754437"/>
-            <a:ext cx="2127249" cy="277812"/>
-          </a:xfrm>
-          <a:prstGeom prst="rect">
-            <a:avLst/>
-          </a:prstGeom>
-          <a:noFill/>
-          <a:effectLst/>
-        </p:spPr>
-        <p:txBody>
-          <a:bodyPr wrap="none" anchor="ctr" tIns="0" rIns="0" bIns="0" lIns="0" anchorCtr="0" vertOverflow="overflow">
-            <a:noAutofit/>
-          </a:bodyPr>
-          <a:lstStyle/>
-          <a:p>
-            <a:pPr algn="l" fontAlgn="base">
-              <a:lnSpc>
-                <a:spcPts val="1828"/>
-              </a:lnSpc>
-              <a:spcBef>
-                <a:spcPts val="0"/>
-              </a:spcBef>
-              <a:spcAft>
-                <a:spcPts val="0"/>
-              </a:spcAft>
-              <a:defRPr sz="1249" b="1" i="0" lang="zh-CN" dirty="0">
-                <a:solidFill>
-                  <a:srgbClr val="27303A"/>
-                </a:solidFill>
-                <a:latin typeface="Noto Sans CJK SC"/>
-                <a:ea typeface="Noto Sans CJK SC"/>
-                <a:cs typeface="Noto Sans CJK SC"/>
-              </a:defRPr>
-            </a:pPr>
-            <a:r>
-              <a:rPr sz="1249" b="1" i="0" lang="zh-CN" dirty="0">
-                <a:solidFill>
-                  <a:srgbClr val="27303A"/>
-                </a:solidFill>
-                <a:latin typeface="Noto Sans CJK SC"/>
-                <a:ea typeface="Noto Sans CJK SC"/>
-                <a:cs typeface="Noto Sans CJK SC"/>
-              </a:rPr>
-              <a:t>容器与助熔剂</a:t>
-            </a:r>
-          </a:p>
-        </p:txBody>
-      </p:sp>
-      <p:sp>
-        <p:nvSpPr>
-          <p:cNvPr id="90" name="ledr_r4" descr="Editable shape; source id ledr_r4"/>
-          <p:cNvSpPr/>
-          <p:nvPr/>
-        </p:nvSpPr>
-        <p:spPr>
-          <a:xfrm>
-            <a:off x="5143499" y="4214812"/>
-            <a:ext cx="2619374" cy="484187"/>
-          </a:xfrm>
-          <a:prstGeom prst="roundRect">
-            <a:avLst>
-              <a:gd name="adj" fmla="val 9836"/>
-            </a:avLst>
-          </a:prstGeom>
-          <a:solidFill>
-            <a:srgbClr val="F4F7FA"/>
-          </a:solidFill>
-          <a:ln w="12699">
-            <a:solidFill>
-              <a:srgbClr val="AEBBC7"/>
-            </a:solidFill>
-          </a:ln>
-          <a:effectLst/>
-        </p:spPr>
-        <p:style>
-          <a:lnRef idx="1">
-            <a:schemeClr val="accent1"/>
-          </a:lnRef>
-          <a:fillRef idx="3">
-            <a:schemeClr val="accent1"/>
-          </a:fillRef>
-          <a:effectRef idx="0">
-            <a:schemeClr val="accent1"/>
-          </a:effectRef>
-          <a:fontRef idx="minor">
-            <a:schemeClr val="lt1"/>
-          </a:fontRef>
-        </p:style>
-        <p:txBody>
-          <a:bodyPr rtlCol="0" anchor="ctr"/>
-          <a:lstStyle/>
-          <a:p>
-            <a:pPr algn="ctr"/>
-          </a:p>
-        </p:txBody>
-      </p:sp>
-      <p:sp>
-        <p:nvSpPr>
-          <p:cNvPr id="91" name="ledr_c4_b" descr="Editable shape; source id ledr_c4_b"/>
-          <p:cNvSpPr/>
-          <p:nvPr/>
-        </p:nvSpPr>
-        <p:spPr>
-          <a:xfrm>
-            <a:off x="5254624" y="4381499"/>
-            <a:ext cx="142874" cy="142874"/>
-          </a:xfrm>
-          <a:prstGeom prst="rect">
-            <a:avLst/>
-          </a:prstGeom>
-          <a:noFill/>
-          <a:ln w="18216">
-            <a:solidFill>
-              <a:srgbClr val="111A24"/>
-            </a:solidFill>
-          </a:ln>
-          <a:effectLst/>
-        </p:spPr>
-        <p:style>
-          <a:lnRef idx="1">
-            <a:schemeClr val="accent1"/>
-          </a:lnRef>
-          <a:fillRef idx="3">
-            <a:schemeClr val="accent1"/>
-          </a:fillRef>
-          <a:effectRef idx="0">
-            <a:schemeClr val="accent1"/>
-          </a:effectRef>
-          <a:fontRef idx="minor">
-            <a:schemeClr val="lt1"/>
-          </a:fontRef>
-        </p:style>
-        <p:txBody>
-          <a:bodyPr rtlCol="0" anchor="ctr"/>
-          <a:lstStyle/>
-          <a:p>
-            <a:pPr algn="ctr"/>
-          </a:p>
-        </p:txBody>
-      </p:sp>
-      <p:cxnSp>
-        <p:nvCxnSpPr>
-          <p:cNvPr id="92" name="ledr_c4_k_0" descr="Editable line; source id ledr_c4_k_0"/>
-          <p:cNvCxnSpPr/>
-          <p:nvPr/>
-        </p:nvCxnSpPr>
-        <p:spPr>
-          <a:xfrm>
-            <a:off x="5286374" y="4452937"/>
-            <a:ext cx="31750" cy="31750"/>
-          </a:xfrm>
-          <a:prstGeom prst="line">
-            <a:avLst/>
-          </a:prstGeom>
-          <a:ln w="23681">
-            <a:solidFill>
-              <a:srgbClr val="111A24"/>
-            </a:solidFill>
-          </a:ln>
-          <a:effectLst/>
-        </p:spPr>
-        <p:style>
-          <a:lnRef idx="2">
-            <a:schemeClr val="accent1"/>
-          </a:lnRef>
-          <a:fillRef idx="0">
-            <a:schemeClr val="accent1"/>
-          </a:fillRef>
-          <a:effectRef idx="0">
-            <a:schemeClr val="accent1"/>
-          </a:effectRef>
-          <a:fontRef idx="minor">
-            <a:schemeClr val="tx1"/>
-          </a:fontRef>
-        </p:style>
-      </p:cxnSp>
-      <p:cxnSp>
-        <p:nvCxnSpPr>
-          <p:cNvPr id="93" name="ledr_c4_k_1" descr="Editable line; source id ledr_c4_k_1"/>
-          <p:cNvCxnSpPr/>
-          <p:nvPr/>
-        </p:nvCxnSpPr>
-        <p:spPr>
-          <a:xfrm flipV="1">
-            <a:off x="5318124" y="4421187"/>
-            <a:ext cx="55563" cy="63500"/>
-          </a:xfrm>
-          <a:prstGeom prst="line">
-            <a:avLst/>
-          </a:prstGeom>
-          <a:ln w="23681">
-            <a:solidFill>
-              <a:srgbClr val="111A24"/>
-            </a:solidFill>
-          </a:ln>
-          <a:effectLst/>
-        </p:spPr>
-        <p:style>
-          <a:lnRef idx="2">
-            <a:schemeClr val="accent1"/>
-          </a:lnRef>
-          <a:fillRef idx="0">
-            <a:schemeClr val="accent1"/>
-          </a:fillRef>
-          <a:effectRef idx="0">
-            <a:schemeClr val="accent1"/>
-          </a:effectRef>
-          <a:fontRef idx="minor">
-            <a:schemeClr val="tx1"/>
-          </a:fontRef>
-        </p:style>
-      </p:cxnSp>
-      <p:sp>
-        <p:nvSpPr>
-          <p:cNvPr id="94" name="ledr_x4" descr="Editable text; source id ledr_x4"/>
-          <p:cNvSpPr txBox="1"/>
-          <p:nvPr/>
-        </p:nvSpPr>
-        <p:spPr>
-          <a:xfrm>
-            <a:off x="5508624" y="4317999"/>
-            <a:ext cx="2127249" cy="277812"/>
-          </a:xfrm>
-          <a:prstGeom prst="rect">
-            <a:avLst/>
-          </a:prstGeom>
-          <a:noFill/>
-          <a:effectLst/>
-        </p:spPr>
-        <p:txBody>
-          <a:bodyPr wrap="none" anchor="ctr" tIns="0" rIns="0" bIns="0" lIns="0" anchorCtr="0" vertOverflow="overflow">
-            <a:noAutofit/>
-          </a:bodyPr>
-          <a:lstStyle/>
-          <a:p>
-            <a:pPr algn="l" fontAlgn="base">
-              <a:lnSpc>
-                <a:spcPts val="1828"/>
-              </a:lnSpc>
-              <a:spcBef>
-                <a:spcPts val="0"/>
-              </a:spcBef>
-              <a:spcAft>
-                <a:spcPts val="0"/>
-              </a:spcAft>
-              <a:defRPr sz="1249" b="1" i="0" lang="zh-CN" dirty="0">
-                <a:solidFill>
-                  <a:srgbClr val="27303A"/>
-                </a:solidFill>
-                <a:latin typeface="Noto Sans CJK SC"/>
-                <a:ea typeface="Noto Sans CJK SC"/>
-                <a:cs typeface="Noto Sans CJK SC"/>
-              </a:defRPr>
-            </a:pPr>
-            <a:r>
-              <a:rPr sz="1249" b="1" i="0" lang="zh-CN" dirty="0">
-                <a:solidFill>
-                  <a:srgbClr val="27303A"/>
-                </a:solidFill>
-                <a:latin typeface="Noto Sans CJK SC"/>
-                <a:ea typeface="Noto Sans CJK SC"/>
-                <a:cs typeface="Noto Sans CJK SC"/>
-              </a:rPr>
-              <a:t>冷却与分离</a:t>
-            </a:r>
-          </a:p>
-        </p:txBody>
-      </p:sp>
-      <p:sp>
-        <p:nvSpPr>
-          <p:cNvPr id="95" name="ledr_r5" descr="Editable shape; source id ledr_r5"/>
-          <p:cNvSpPr/>
-          <p:nvPr/>
-        </p:nvSpPr>
-        <p:spPr>
-          <a:xfrm>
-            <a:off x="5143499" y="4770437"/>
-            <a:ext cx="2619374" cy="484187"/>
-          </a:xfrm>
-          <a:prstGeom prst="roundRect">
-            <a:avLst>
-              <a:gd name="adj" fmla="val 9836"/>
-            </a:avLst>
-          </a:prstGeom>
-          <a:solidFill>
-            <a:srgbClr val="F4F7FA"/>
-          </a:solidFill>
-          <a:ln w="12699">
-            <a:solidFill>
-              <a:srgbClr val="AEBBC7"/>
-            </a:solidFill>
-          </a:ln>
-          <a:effectLst/>
-        </p:spPr>
-        <p:style>
-          <a:lnRef idx="1">
-            <a:schemeClr val="accent1"/>
-          </a:lnRef>
-          <a:fillRef idx="3">
-            <a:schemeClr val="accent1"/>
-          </a:fillRef>
-          <a:effectRef idx="0">
-            <a:schemeClr val="accent1"/>
-          </a:effectRef>
-          <a:fontRef idx="minor">
-            <a:schemeClr val="lt1"/>
-          </a:fontRef>
-        </p:style>
-        <p:txBody>
-          <a:bodyPr rtlCol="0" anchor="ctr"/>
-          <a:lstStyle/>
-          <a:p>
-            <a:pPr algn="ctr"/>
-          </a:p>
-        </p:txBody>
-      </p:sp>
-      <p:sp>
-        <p:nvSpPr>
-          <p:cNvPr id="96" name="ledr_c5_b" descr="Editable shape; source id ledr_c5_b"/>
-          <p:cNvSpPr/>
-          <p:nvPr/>
-        </p:nvSpPr>
-        <p:spPr>
-          <a:xfrm>
-            <a:off x="5254624" y="4937124"/>
-            <a:ext cx="142874" cy="142874"/>
-          </a:xfrm>
-          <a:prstGeom prst="rect">
-            <a:avLst/>
-          </a:prstGeom>
-          <a:noFill/>
-          <a:ln w="18216">
-            <a:solidFill>
-              <a:srgbClr val="111A24"/>
-            </a:solidFill>
-          </a:ln>
-          <a:effectLst/>
-        </p:spPr>
-        <p:style>
-          <a:lnRef idx="1">
-            <a:schemeClr val="accent1"/>
-          </a:lnRef>
-          <a:fillRef idx="3">
-            <a:schemeClr val="accent1"/>
-          </a:fillRef>
-          <a:effectRef idx="0">
-            <a:schemeClr val="accent1"/>
-          </a:effectRef>
-          <a:fontRef idx="minor">
-            <a:schemeClr val="lt1"/>
-          </a:fontRef>
-        </p:style>
-        <p:txBody>
-          <a:bodyPr rtlCol="0" anchor="ctr"/>
-          <a:lstStyle/>
-          <a:p>
-            <a:pPr algn="ctr"/>
-          </a:p>
-        </p:txBody>
-      </p:sp>
-      <p:cxnSp>
-        <p:nvCxnSpPr>
-          <p:cNvPr id="97" name="ledr_c5_k_0" descr="Editable line; source id ledr_c5_k_0"/>
-          <p:cNvCxnSpPr/>
-          <p:nvPr/>
-        </p:nvCxnSpPr>
-        <p:spPr>
-          <a:xfrm>
-            <a:off x="5286374" y="5016499"/>
-            <a:ext cx="31750" cy="31750"/>
-          </a:xfrm>
-          <a:prstGeom prst="line">
-            <a:avLst/>
-          </a:prstGeom>
-          <a:ln w="23681">
-            <a:solidFill>
-              <a:srgbClr val="111A24"/>
-            </a:solidFill>
-          </a:ln>
-          <a:effectLst/>
-        </p:spPr>
-        <p:style>
-          <a:lnRef idx="2">
-            <a:schemeClr val="accent1"/>
-          </a:lnRef>
-          <a:fillRef idx="0">
-            <a:schemeClr val="accent1"/>
-          </a:fillRef>
-          <a:effectRef idx="0">
-            <a:schemeClr val="accent1"/>
-          </a:effectRef>
-          <a:fontRef idx="minor">
-            <a:schemeClr val="tx1"/>
-          </a:fontRef>
-        </p:style>
-      </p:cxnSp>
-      <p:cxnSp>
-        <p:nvCxnSpPr>
-          <p:cNvPr id="98" name="ledr_c5_k_1" descr="Editable line; source id ledr_c5_k_1"/>
-          <p:cNvCxnSpPr/>
-          <p:nvPr/>
-        </p:nvCxnSpPr>
-        <p:spPr>
-          <a:xfrm flipV="1">
-            <a:off x="5318124" y="4976812"/>
-            <a:ext cx="55563" cy="71437"/>
-          </a:xfrm>
-          <a:prstGeom prst="line">
-            <a:avLst/>
-          </a:prstGeom>
-          <a:ln w="23681">
-            <a:solidFill>
-              <a:srgbClr val="111A24"/>
-            </a:solidFill>
-          </a:ln>
-          <a:effectLst/>
-        </p:spPr>
-        <p:style>
-          <a:lnRef idx="2">
-            <a:schemeClr val="accent1"/>
-          </a:lnRef>
-          <a:fillRef idx="0">
-            <a:schemeClr val="accent1"/>
-          </a:fillRef>
-          <a:effectRef idx="0">
-            <a:schemeClr val="accent1"/>
-          </a:effectRef>
-          <a:fontRef idx="minor">
-            <a:schemeClr val="tx1"/>
-          </a:fontRef>
-        </p:style>
-      </p:cxnSp>
-      <p:sp>
-        <p:nvSpPr>
-          <p:cNvPr id="99" name="ledr_x5" descr="Editable text; source id ledr_x5"/>
-          <p:cNvSpPr txBox="1"/>
-          <p:nvPr/>
-        </p:nvSpPr>
-        <p:spPr>
-          <a:xfrm>
-            <a:off x="5508624" y="4873624"/>
-            <a:ext cx="2127249" cy="277812"/>
-          </a:xfrm>
-          <a:prstGeom prst="rect">
-            <a:avLst/>
-          </a:prstGeom>
-          <a:noFill/>
-          <a:effectLst/>
-        </p:spPr>
-        <p:txBody>
-          <a:bodyPr wrap="none" anchor="ctr" tIns="0" rIns="0" bIns="0" lIns="0" anchorCtr="0" vertOverflow="overflow">
-            <a:noAutofit/>
-          </a:bodyPr>
-          <a:lstStyle/>
-          <a:p>
-            <a:pPr algn="l" fontAlgn="base">
-              <a:lnSpc>
-                <a:spcPts val="1828"/>
-              </a:lnSpc>
-              <a:spcBef>
-                <a:spcPts val="0"/>
-              </a:spcBef>
-              <a:spcAft>
-                <a:spcPts val="0"/>
-              </a:spcAft>
-              <a:defRPr sz="1249" b="1" i="0" lang="zh-CN" dirty="0">
-                <a:solidFill>
-                  <a:srgbClr val="27303A"/>
-                </a:solidFill>
-                <a:latin typeface="Noto Sans CJK SC"/>
-                <a:ea typeface="Noto Sans CJK SC"/>
-                <a:cs typeface="Noto Sans CJK SC"/>
-              </a:defRPr>
-            </a:pPr>
-            <a:r>
-              <a:rPr sz="1249" b="1" i="0" lang="zh-CN" dirty="0">
+              <a:rPr sz="1749" b="0" i="0" lang="zh-CN" dirty="0">
                 <a:solidFill>
                   <a:srgbClr val="27303A"/>
                 </a:solidFill>
@@ -7887,12 +7849,12 @@
         </p:nvSpPr>
         <p:spPr>
           <a:xfrm>
-            <a:off x="8540749" y="1190624"/>
-            <a:ext cx="3254374" cy="888999"/>
+            <a:off x="8143874" y="809624"/>
+            <a:ext cx="3714749" cy="857249"/>
           </a:xfrm>
           <a:prstGeom prst="roundRect">
             <a:avLst>
-              <a:gd name="adj" fmla="val 8035"/>
+              <a:gd name="adj" fmla="val 8333"/>
             </a:avLst>
           </a:prstGeom>
           <a:solidFill>
@@ -7935,12 +7897,12 @@
         </p:nvSpPr>
         <p:spPr>
           <a:xfrm>
-            <a:off x="8540749" y="1190624"/>
-            <a:ext cx="63499" cy="888999"/>
+            <a:off x="8143874" y="809624"/>
+            <a:ext cx="47624" cy="857249"/>
           </a:xfrm>
           <a:prstGeom prst="roundRect">
             <a:avLst>
-              <a:gd name="adj" fmla="val 37500"/>
+              <a:gd name="adj" fmla="val 50000"/>
             </a:avLst>
           </a:prstGeom>
           <a:solidFill>
@@ -7981,7 +7943,7 @@
         </p:nvCxnSpPr>
         <p:spPr>
           <a:xfrm>
-            <a:off x="8874124" y="1508124"/>
+            <a:off x="8413749" y="1111249"/>
             <a:ext cx="0" cy="87313"/>
           </a:xfrm>
           <a:prstGeom prst="line">
@@ -8017,7 +7979,7 @@
         </p:nvCxnSpPr>
         <p:spPr>
           <a:xfrm flipH="1">
-            <a:off x="8794749" y="1595437"/>
+            <a:off x="8334374" y="1198562"/>
             <a:ext cx="79375" cy="158750"/>
           </a:xfrm>
           <a:prstGeom prst="line">
@@ -8053,7 +8015,7 @@
         </p:nvCxnSpPr>
         <p:spPr>
           <a:xfrm>
-            <a:off x="8794749" y="1754187"/>
+            <a:off x="8334374" y="1357312"/>
             <a:ext cx="222250" cy="0"/>
           </a:xfrm>
           <a:prstGeom prst="line">
@@ -8089,7 +8051,7 @@
         </p:nvCxnSpPr>
         <p:spPr>
           <a:xfrm flipH="1" flipV="1">
-            <a:off x="8937624" y="1595437"/>
+            <a:off x="8477249" y="1198562"/>
             <a:ext cx="79375" cy="158750"/>
           </a:xfrm>
           <a:prstGeom prst="line">
@@ -8125,7 +8087,7 @@
         </p:nvCxnSpPr>
         <p:spPr>
           <a:xfrm flipV="1">
-            <a:off x="8937624" y="1508124"/>
+            <a:off x="8477249" y="1111249"/>
             <a:ext cx="0" cy="87313"/>
           </a:xfrm>
           <a:prstGeom prst="line">
@@ -8161,7 +8123,7 @@
         </p:nvCxnSpPr>
         <p:spPr>
           <a:xfrm>
-            <a:off x="8858249" y="1508124"/>
+            <a:off x="8397874" y="1111249"/>
             <a:ext cx="95250" cy="0"/>
           </a:xfrm>
           <a:prstGeom prst="line">
@@ -8197,7 +8159,7 @@
         </p:nvSpPr>
         <p:spPr>
           <a:xfrm>
-            <a:off x="8866187" y="1682749"/>
+            <a:off x="8405812" y="1285874"/>
             <a:ext cx="23812" cy="23812"/>
           </a:xfrm>
           <a:prstGeom prst="ellipse">
@@ -8241,7 +8203,7 @@
         </p:nvSpPr>
         <p:spPr>
           <a:xfrm>
-            <a:off x="8921749" y="1706562"/>
+            <a:off x="8461374" y="1309687"/>
             <a:ext cx="15874" cy="15874"/>
           </a:xfrm>
           <a:prstGeom prst="ellipse">
@@ -8285,8 +8247,8 @@
         </p:nvSpPr>
         <p:spPr>
           <a:xfrm>
-            <a:off x="9159874" y="1476374"/>
-            <a:ext cx="2492374" cy="325437"/>
+            <a:off x="8683624" y="1023937"/>
+            <a:ext cx="3079749" cy="420687"/>
           </a:xfrm>
           <a:prstGeom prst="rect">
             <a:avLst/>
@@ -8302,7 +8264,7 @@
           <a:p>
             <a:pPr algn="l" fontAlgn="base">
               <a:lnSpc>
-                <a:spcPts val="2187"/>
+                <a:spcPts val="2812"/>
               </a:lnSpc>
               <a:spcBef>
                 <a:spcPts val="0"/>
@@ -8310,7 +8272,7 @@
               <a:spcAft>
                 <a:spcPts val="0"/>
               </a:spcAft>
-              <a:defRPr sz="1499" b="1" i="0" lang="zh-CN" dirty="0">
+              <a:defRPr sz="1937" b="1" i="0" lang="zh-CN" dirty="0">
                 <a:solidFill>
                   <a:srgbClr val="7A5410"/>
                 </a:solidFill>
@@ -8320,7 +8282,7 @@
               </a:defRPr>
             </a:pPr>
             <a:r>
-              <a:rPr sz="1499" b="1" i="0" lang="zh-CN" dirty="0">
+              <a:rPr sz="1937" b="1" i="0" lang="zh-CN" dirty="0">
                 <a:solidFill>
                   <a:srgbClr val="7A5410"/>
                 </a:solidFill>
@@ -8341,12 +8303,12 @@
         </p:nvSpPr>
         <p:spPr>
           <a:xfrm>
-            <a:off x="8540749" y="2238374"/>
-            <a:ext cx="3254374" cy="888999"/>
+            <a:off x="8143874" y="1857374"/>
+            <a:ext cx="3714749" cy="857249"/>
           </a:xfrm>
           <a:prstGeom prst="roundRect">
             <a:avLst>
-              <a:gd name="adj" fmla="val 8035"/>
+              <a:gd name="adj" fmla="val 8333"/>
             </a:avLst>
           </a:prstGeom>
           <a:solidFill>
@@ -8389,12 +8351,12 @@
         </p:nvSpPr>
         <p:spPr>
           <a:xfrm>
-            <a:off x="8540749" y="2238374"/>
-            <a:ext cx="63499" cy="888999"/>
+            <a:off x="8143874" y="1857374"/>
+            <a:ext cx="47624" cy="857249"/>
           </a:xfrm>
           <a:prstGeom prst="roundRect">
             <a:avLst>
-              <a:gd name="adj" fmla="val 37500"/>
+              <a:gd name="adj" fmla="val 50000"/>
             </a:avLst>
           </a:prstGeom>
           <a:solidFill>
@@ -8435,8 +8397,8 @@
         </p:nvCxnSpPr>
         <p:spPr>
           <a:xfrm>
-            <a:off x="8905874" y="2547937"/>
-            <a:ext cx="127000" cy="87312"/>
+            <a:off x="8445499" y="2151062"/>
+            <a:ext cx="127000" cy="79375"/>
           </a:xfrm>
           <a:prstGeom prst="line">
             <a:avLst/>
@@ -8471,8 +8433,8 @@
         </p:nvCxnSpPr>
         <p:spPr>
           <a:xfrm flipH="1">
-            <a:off x="8977312" y="2635249"/>
-            <a:ext cx="55562" cy="166688"/>
+            <a:off x="8516937" y="2230437"/>
+            <a:ext cx="55562" cy="174625"/>
           </a:xfrm>
           <a:prstGeom prst="line">
             <a:avLst/>
@@ -8507,7 +8469,7 @@
         </p:nvCxnSpPr>
         <p:spPr>
           <a:xfrm flipH="1">
-            <a:off x="8834437" y="2801937"/>
+            <a:off x="8374062" y="2405062"/>
             <a:ext cx="142875" cy="0"/>
           </a:xfrm>
           <a:prstGeom prst="line">
@@ -8543,8 +8505,8 @@
         </p:nvCxnSpPr>
         <p:spPr>
           <a:xfrm flipH="1" flipV="1">
-            <a:off x="8778874" y="2635249"/>
-            <a:ext cx="55563" cy="166688"/>
+            <a:off x="8318499" y="2230437"/>
+            <a:ext cx="55563" cy="174625"/>
           </a:xfrm>
           <a:prstGeom prst="line">
             <a:avLst/>
@@ -8579,8 +8541,8 @@
         </p:nvCxnSpPr>
         <p:spPr>
           <a:xfrm flipV="1">
-            <a:off x="8778874" y="2547937"/>
-            <a:ext cx="127000" cy="87312"/>
+            <a:off x="8318499" y="2151062"/>
+            <a:ext cx="127000" cy="79375"/>
           </a:xfrm>
           <a:prstGeom prst="line">
             <a:avLst/>
@@ -8615,7 +8577,7 @@
         </p:nvCxnSpPr>
         <p:spPr>
           <a:xfrm>
-            <a:off x="8905874" y="2547937"/>
+            <a:off x="8445499" y="2151062"/>
             <a:ext cx="0" cy="254000"/>
           </a:xfrm>
           <a:prstGeom prst="line">
@@ -8651,7 +8613,7 @@
         </p:nvCxnSpPr>
         <p:spPr>
           <a:xfrm>
-            <a:off x="8778874" y="2635249"/>
+            <a:off x="8318499" y="2230437"/>
             <a:ext cx="254000" cy="0"/>
           </a:xfrm>
           <a:prstGeom prst="line">
@@ -8687,8 +8649,8 @@
         </p:nvSpPr>
         <p:spPr>
           <a:xfrm>
-            <a:off x="9159874" y="2524124"/>
-            <a:ext cx="2492374" cy="325437"/>
+            <a:off x="8683624" y="2071687"/>
+            <a:ext cx="3079749" cy="420687"/>
           </a:xfrm>
           <a:prstGeom prst="rect">
             <a:avLst/>
@@ -8704,7 +8666,7 @@
           <a:p>
             <a:pPr algn="l" fontAlgn="base">
               <a:lnSpc>
-                <a:spcPts val="2187"/>
+                <a:spcPts val="2812"/>
               </a:lnSpc>
               <a:spcBef>
                 <a:spcPts val="0"/>
@@ -8712,7 +8674,7 @@
               <a:spcAft>
                 <a:spcPts val="0"/>
               </a:spcAft>
-              <a:defRPr sz="1499" b="1" i="0" lang="zh-CN" dirty="0">
+              <a:defRPr sz="1937" b="1" i="0" lang="zh-CN" dirty="0">
                 <a:solidFill>
                   <a:srgbClr val="7A5410"/>
                 </a:solidFill>
@@ -8722,7 +8684,7 @@
               </a:defRPr>
             </a:pPr>
             <a:r>
-              <a:rPr sz="1499" b="1" i="0" lang="zh-CN" dirty="0">
+              <a:rPr sz="1937" b="1" i="0" lang="zh-CN" dirty="0">
                 <a:solidFill>
                   <a:srgbClr val="7A5410"/>
                 </a:solidFill>
@@ -8743,12 +8705,12 @@
         </p:nvSpPr>
         <p:spPr>
           <a:xfrm>
-            <a:off x="8540749" y="3286124"/>
-            <a:ext cx="3254374" cy="888999"/>
+            <a:off x="8143874" y="2905124"/>
+            <a:ext cx="3714749" cy="857249"/>
           </a:xfrm>
           <a:prstGeom prst="roundRect">
             <a:avLst>
-              <a:gd name="adj" fmla="val 8035"/>
+              <a:gd name="adj" fmla="val 8333"/>
             </a:avLst>
           </a:prstGeom>
           <a:solidFill>
@@ -8791,12 +8753,12 @@
         </p:nvSpPr>
         <p:spPr>
           <a:xfrm>
-            <a:off x="8540749" y="3286124"/>
-            <a:ext cx="63499" cy="888999"/>
+            <a:off x="8143874" y="2905124"/>
+            <a:ext cx="47624" cy="857249"/>
           </a:xfrm>
           <a:prstGeom prst="roundRect">
             <a:avLst>
-              <a:gd name="adj" fmla="val 37500"/>
+              <a:gd name="adj" fmla="val 50000"/>
             </a:avLst>
           </a:prstGeom>
           <a:solidFill>
@@ -8837,8 +8799,8 @@
         </p:nvCxnSpPr>
         <p:spPr>
           <a:xfrm>
-            <a:off x="8905874" y="3619499"/>
-            <a:ext cx="0" cy="198438"/>
+            <a:off x="8445499" y="3214687"/>
+            <a:ext cx="0" cy="206375"/>
           </a:xfrm>
           <a:prstGeom prst="line">
             <a:avLst/>
@@ -8873,7 +8835,7 @@
         </p:nvCxnSpPr>
         <p:spPr>
           <a:xfrm>
-            <a:off x="8794749" y="3659187"/>
+            <a:off x="8334374" y="3262312"/>
             <a:ext cx="222250" cy="0"/>
           </a:xfrm>
           <a:prstGeom prst="line">
@@ -8909,8 +8871,8 @@
         </p:nvCxnSpPr>
         <p:spPr>
           <a:xfrm flipH="1">
-            <a:off x="8762999" y="3659187"/>
-            <a:ext cx="31750" cy="71437"/>
+            <a:off x="8302624" y="3262312"/>
+            <a:ext cx="31750" cy="63500"/>
           </a:xfrm>
           <a:prstGeom prst="line">
             <a:avLst/>
@@ -8945,7 +8907,7 @@
         </p:nvCxnSpPr>
         <p:spPr>
           <a:xfrm>
-            <a:off x="8762999" y="3730624"/>
+            <a:off x="8302624" y="3325812"/>
             <a:ext cx="63500" cy="0"/>
           </a:xfrm>
           <a:prstGeom prst="line">
@@ -8981,8 +8943,8 @@
         </p:nvCxnSpPr>
         <p:spPr>
           <a:xfrm flipH="1" flipV="1">
-            <a:off x="8794749" y="3659187"/>
-            <a:ext cx="31750" cy="71437"/>
+            <a:off x="8334374" y="3262312"/>
+            <a:ext cx="31750" cy="63500"/>
           </a:xfrm>
           <a:prstGeom prst="line">
             <a:avLst/>
@@ -9017,8 +8979,8 @@
         </p:nvCxnSpPr>
         <p:spPr>
           <a:xfrm flipH="1">
-            <a:off x="8985249" y="3659187"/>
-            <a:ext cx="31750" cy="71437"/>
+            <a:off x="8524874" y="3262312"/>
+            <a:ext cx="31750" cy="63500"/>
           </a:xfrm>
           <a:prstGeom prst="line">
             <a:avLst/>
@@ -9053,7 +9015,7 @@
         </p:nvCxnSpPr>
         <p:spPr>
           <a:xfrm>
-            <a:off x="8985249" y="3730624"/>
+            <a:off x="8524874" y="3325812"/>
             <a:ext cx="63500" cy="0"/>
           </a:xfrm>
           <a:prstGeom prst="line">
@@ -9089,8 +9051,8 @@
         </p:nvCxnSpPr>
         <p:spPr>
           <a:xfrm flipH="1" flipV="1">
-            <a:off x="9016999" y="3659187"/>
-            <a:ext cx="31750" cy="71437"/>
+            <a:off x="8556624" y="3262312"/>
+            <a:ext cx="31750" cy="63500"/>
           </a:xfrm>
           <a:prstGeom prst="line">
             <a:avLst/>
@@ -9125,7 +9087,7 @@
         </p:nvCxnSpPr>
         <p:spPr>
           <a:xfrm>
-            <a:off x="8842374" y="3841749"/>
+            <a:off x="8381999" y="3444874"/>
             <a:ext cx="127000" cy="0"/>
           </a:xfrm>
           <a:prstGeom prst="line">
@@ -9161,8 +9123,8 @@
         </p:nvSpPr>
         <p:spPr>
           <a:xfrm>
-            <a:off x="9159874" y="3571874"/>
-            <a:ext cx="2492374" cy="325437"/>
+            <a:off x="8683624" y="3119437"/>
+            <a:ext cx="3079749" cy="420687"/>
           </a:xfrm>
           <a:prstGeom prst="rect">
             <a:avLst/>
@@ -9178,7 +9140,7 @@
           <a:p>
             <a:pPr algn="l" fontAlgn="base">
               <a:lnSpc>
-                <a:spcPts val="2187"/>
+                <a:spcPts val="2812"/>
               </a:lnSpc>
               <a:spcBef>
                 <a:spcPts val="0"/>
@@ -9186,7 +9148,7 @@
               <a:spcAft>
                 <a:spcPts val="0"/>
               </a:spcAft>
-              <a:defRPr sz="1499" b="1" i="0" lang="zh-CN" dirty="0">
+              <a:defRPr sz="1937" b="1" i="0" lang="zh-CN" dirty="0">
                 <a:solidFill>
                   <a:srgbClr val="7A5410"/>
                 </a:solidFill>
@@ -9196,7 +9158,7 @@
               </a:defRPr>
             </a:pPr>
             <a:r>
-              <a:rPr sz="1499" b="1" i="0" lang="zh-CN" dirty="0">
+              <a:rPr sz="1937" b="1" i="0" lang="zh-CN" dirty="0">
                 <a:solidFill>
                   <a:srgbClr val="7A5410"/>
                 </a:solidFill>
@@ -9217,8 +9179,8 @@
         </p:nvSpPr>
         <p:spPr>
           <a:xfrm>
-            <a:off x="9255124" y="4603749"/>
-            <a:ext cx="1825624" cy="317499"/>
+            <a:off x="8810624" y="4079874"/>
+            <a:ext cx="2389187" cy="404812"/>
           </a:xfrm>
           <a:prstGeom prst="roundRect">
             <a:avLst>
@@ -9265,8 +9227,8 @@
         </p:nvSpPr>
         <p:spPr>
           <a:xfrm>
-            <a:off x="9334499" y="4635499"/>
-            <a:ext cx="1666874" cy="253999"/>
+            <a:off x="8889999" y="4111624"/>
+            <a:ext cx="2230437" cy="341312"/>
           </a:xfrm>
           <a:prstGeom prst="rect">
             <a:avLst/>
@@ -9282,7 +9244,7 @@
           <a:p>
             <a:pPr algn="ctr" fontAlgn="base">
               <a:lnSpc>
-                <a:spcPts val="1734"/>
+                <a:spcPts val="2359"/>
               </a:lnSpc>
               <a:spcBef>
                 <a:spcPts val="0"/>
@@ -9290,7 +9252,7 @@
               <a:spcAft>
                 <a:spcPts val="0"/>
               </a:spcAft>
-              <a:defRPr sz="1187" b="1" i="0" lang="zh-CN" dirty="0">
+              <a:defRPr sz="1624" b="0" i="0" lang="zh-CN" dirty="0">
                 <a:solidFill>
                   <a:srgbClr val="7A5410"/>
                 </a:solidFill>
@@ -9300,7 +9262,7 @@
               </a:defRPr>
             </a:pPr>
             <a:r>
-              <a:rPr sz="1187" b="1" i="0" lang="zh-CN" dirty="0">
+              <a:rPr sz="1624" b="0" i="0" lang="zh-CN" dirty="0">
                 <a:solidFill>
                   <a:srgbClr val="7A5410"/>
                 </a:solidFill>
@@ -9311,7 +9273,7 @@
               <a:t>近邻条件</a:t>
             </a:r>
             <a:r>
-              <a:rPr sz="1187" b="1" i="0" lang="zh-CN" dirty="0">
+              <a:rPr sz="1624" b="0" i="0" lang="zh-CN" dirty="0">
                 <a:solidFill>
                   <a:srgbClr val="7A5410"/>
                 </a:solidFill>
@@ -9322,7 +9284,7 @@
               <a:t> ≠ </a:t>
             </a:r>
             <a:r>
-              <a:rPr sz="1187" b="1" i="0" lang="zh-CN" dirty="0">
+              <a:rPr sz="1624" b="0" i="0" lang="zh-CN" dirty="0">
                 <a:solidFill>
                   <a:srgbClr val="7A5410"/>
                 </a:solidFill>
@@ -9343,12 +9305,12 @@
         </p:nvSpPr>
         <p:spPr>
           <a:xfrm>
-            <a:off x="8540749" y="5556249"/>
-            <a:ext cx="3254374" cy="888999"/>
+            <a:off x="8143874" y="5087937"/>
+            <a:ext cx="3714749" cy="857249"/>
           </a:xfrm>
           <a:prstGeom prst="roundRect">
             <a:avLst>
-              <a:gd name="adj" fmla="val 8035"/>
+              <a:gd name="adj" fmla="val 8333"/>
             </a:avLst>
           </a:prstGeom>
           <a:solidFill>
@@ -9394,7 +9356,7 @@
         </p:nvSpPr>
         <p:spPr>
           <a:xfrm>
-            <a:off x="8810624" y="5905499"/>
+            <a:off x="8350249" y="5421312"/>
             <a:ext cx="190499" cy="190499"/>
           </a:xfrm>
           <a:prstGeom prst="ellipse">
@@ -9438,7 +9400,7 @@
         </p:nvSpPr>
         <p:spPr>
           <a:xfrm>
-            <a:off x="8874124" y="5968999"/>
+            <a:off x="8413749" y="5484812"/>
             <a:ext cx="63499" cy="63499"/>
           </a:xfrm>
           <a:prstGeom prst="ellipse">
@@ -9482,8 +9444,8 @@
         </p:nvCxnSpPr>
         <p:spPr>
           <a:xfrm>
-            <a:off x="8905874" y="5857874"/>
-            <a:ext cx="0" cy="55563"/>
+            <a:off x="8445499" y="5373687"/>
+            <a:ext cx="0" cy="55562"/>
           </a:xfrm>
           <a:prstGeom prst="line">
             <a:avLst/>
@@ -9518,8 +9480,8 @@
         </p:nvCxnSpPr>
         <p:spPr>
           <a:xfrm>
-            <a:off x="8905874" y="6088062"/>
-            <a:ext cx="0" cy="55562"/>
+            <a:off x="8445499" y="5603874"/>
+            <a:ext cx="0" cy="47625"/>
           </a:xfrm>
           <a:prstGeom prst="line">
             <a:avLst/>
@@ -9554,7 +9516,7 @@
         </p:nvCxnSpPr>
         <p:spPr>
           <a:xfrm>
-            <a:off x="8762999" y="6000749"/>
+            <a:off x="8302624" y="5516562"/>
             <a:ext cx="55563" cy="0"/>
           </a:xfrm>
           <a:prstGeom prst="line">
@@ -9590,7 +9552,7 @@
         </p:nvCxnSpPr>
         <p:spPr>
           <a:xfrm>
-            <a:off x="8993187" y="6000749"/>
+            <a:off x="8532812" y="5516562"/>
             <a:ext cx="55562" cy="0"/>
           </a:xfrm>
           <a:prstGeom prst="line">
@@ -9626,8 +9588,8 @@
         </p:nvSpPr>
         <p:spPr>
           <a:xfrm>
-            <a:off x="9159874" y="5841999"/>
-            <a:ext cx="2492374" cy="325437"/>
+            <a:off x="8683624" y="5302249"/>
+            <a:ext cx="3079749" cy="420687"/>
           </a:xfrm>
           <a:prstGeom prst="rect">
             <a:avLst/>
@@ -9643,7 +9605,7 @@
           <a:p>
             <a:pPr algn="l" fontAlgn="base">
               <a:lnSpc>
-                <a:spcPts val="2187"/>
+                <a:spcPts val="2812"/>
               </a:lnSpc>
               <a:spcBef>
                 <a:spcPts val="0"/>
@@ -9651,7 +9613,7 @@
               <a:spcAft>
                 <a:spcPts val="0"/>
               </a:spcAft>
-              <a:defRPr sz="1499" b="1" i="0" lang="zh-CN" dirty="0">
+              <a:defRPr sz="1937" b="1" i="0" lang="zh-CN" dirty="0">
                 <a:solidFill>
                   <a:srgbClr val="5B6570"/>
                 </a:solidFill>
@@ -9661,7 +9623,7 @@
               </a:defRPr>
             </a:pPr>
             <a:r>
-              <a:rPr sz="1499" b="1" i="0" lang="zh-CN" dirty="0">
+              <a:rPr sz="1937" b="1" i="0" lang="zh-CN" dirty="0">
                 <a:solidFill>
                   <a:srgbClr val="5B6570"/>
                 </a:solidFill>
@@ -9682,8 +9644,8 @@
         </p:nvCxnSpPr>
         <p:spPr>
           <a:xfrm>
-            <a:off x="4397374" y="1595437"/>
-            <a:ext cx="238125" cy="0"/>
+            <a:off x="4373562" y="1238249"/>
+            <a:ext cx="182562" cy="0"/>
           </a:xfrm>
           <a:prstGeom prst="line">
             <a:avLst/>
@@ -9718,8 +9680,8 @@
         </p:nvCxnSpPr>
         <p:spPr>
           <a:xfrm>
-            <a:off x="4397374" y="2484437"/>
-            <a:ext cx="238125" cy="0"/>
+            <a:off x="4373562" y="2285999"/>
+            <a:ext cx="182562" cy="0"/>
           </a:xfrm>
           <a:prstGeom prst="line">
             <a:avLst/>
@@ -9754,8 +9716,8 @@
         </p:nvCxnSpPr>
         <p:spPr>
           <a:xfrm>
-            <a:off x="4397374" y="3373437"/>
-            <a:ext cx="238125" cy="0"/>
+            <a:off x="4373562" y="3325812"/>
+            <a:ext cx="182562" cy="0"/>
           </a:xfrm>
           <a:prstGeom prst="line">
             <a:avLst/>
@@ -9790,8 +9752,8 @@
         </p:nvCxnSpPr>
         <p:spPr>
           <a:xfrm>
-            <a:off x="4397374" y="4262437"/>
-            <a:ext cx="238125" cy="0"/>
+            <a:off x="4373562" y="4373562"/>
+            <a:ext cx="182562" cy="0"/>
           </a:xfrm>
           <a:prstGeom prst="line">
             <a:avLst/>
@@ -9826,8 +9788,8 @@
         </p:nvCxnSpPr>
         <p:spPr>
           <a:xfrm>
-            <a:off x="4635499" y="1595437"/>
-            <a:ext cx="0" cy="2667000"/>
+            <a:off x="4556124" y="1238249"/>
+            <a:ext cx="0" cy="3135313"/>
           </a:xfrm>
           <a:prstGeom prst="line">
             <a:avLst/>
@@ -9862,8 +9824,8 @@
         </p:nvSpPr>
         <p:spPr>
           <a:xfrm>
-            <a:off x="4635500" y="2881312"/>
-            <a:ext cx="254000" cy="95250"/>
+            <a:off x="4556125" y="2762250"/>
+            <a:ext cx="198437" cy="95250"/>
           </a:xfrm>
           <a:custGeom>
             <a:avLst/>
@@ -9872,24 +9834,24 @@
             <a:cxnLst/>
             <a:rect l="l" t="t" r="r" b="b"/>
             <a:pathLst>
-              <a:path w="32000" h="12000">
+              <a:path w="25000" h="12000">
                 <a:moveTo>
                   <a:pt x="0" y="4750"/>
                 </a:moveTo>
                 <a:lnTo>
-                  <a:pt x="17000" y="4750"/>
+                  <a:pt x="10000" y="4750"/>
                 </a:lnTo>
                 <a:lnTo>
-                  <a:pt x="17000" y="0"/>
+                  <a:pt x="10000" y="0"/>
                 </a:lnTo>
                 <a:lnTo>
-                  <a:pt x="32000" y="6000"/>
+                  <a:pt x="25000" y="6000"/>
                 </a:lnTo>
                 <a:lnTo>
-                  <a:pt x="17000" y="12000"/>
+                  <a:pt x="10000" y="12000"/>
                 </a:lnTo>
                 <a:lnTo>
-                  <a:pt x="17000" y="7250"/>
+                  <a:pt x="10000" y="7250"/>
                 </a:lnTo>
                 <a:lnTo>
                   <a:pt x="0" y="7250"/>
@@ -9936,8 +9898,8 @@
         </p:nvCxnSpPr>
         <p:spPr>
           <a:xfrm>
-            <a:off x="7985124" y="3333749"/>
-            <a:ext cx="190500" cy="0"/>
+            <a:off x="7739062" y="2809874"/>
+            <a:ext cx="182562" cy="0"/>
           </a:xfrm>
           <a:prstGeom prst="line">
             <a:avLst/>
@@ -9972,8 +9934,8 @@
         </p:nvCxnSpPr>
         <p:spPr>
           <a:xfrm>
-            <a:off x="8175624" y="1635124"/>
-            <a:ext cx="0" cy="2095500"/>
+            <a:off x="7921624" y="1238249"/>
+            <a:ext cx="0" cy="2087563"/>
           </a:xfrm>
           <a:prstGeom prst="line">
             <a:avLst/>
@@ -10008,8 +9970,8 @@
         </p:nvSpPr>
         <p:spPr>
           <a:xfrm>
-            <a:off x="8175625" y="1587500"/>
-            <a:ext cx="333375" cy="95250"/>
+            <a:off x="7921625" y="1190625"/>
+            <a:ext cx="198437" cy="95250"/>
           </a:xfrm>
           <a:custGeom>
             <a:avLst/>
@@ -10018,24 +9980,24 @@
             <a:cxnLst/>
             <a:rect l="l" t="t" r="r" b="b"/>
             <a:pathLst>
-              <a:path w="42000" h="12000">
+              <a:path w="25000" h="12000">
                 <a:moveTo>
                   <a:pt x="0" y="4750"/>
                 </a:moveTo>
                 <a:lnTo>
-                  <a:pt x="27000" y="4750"/>
+                  <a:pt x="10000" y="4750"/>
                 </a:lnTo>
                 <a:lnTo>
-                  <a:pt x="27000" y="0"/>
+                  <a:pt x="10000" y="0"/>
                 </a:lnTo>
                 <a:lnTo>
-                  <a:pt x="42000" y="6000"/>
+                  <a:pt x="25000" y="6000"/>
                 </a:lnTo>
                 <a:lnTo>
-                  <a:pt x="27000" y="12000"/>
+                  <a:pt x="10000" y="12000"/>
                 </a:lnTo>
                 <a:lnTo>
-                  <a:pt x="27000" y="7250"/>
+                  <a:pt x="10000" y="7250"/>
                 </a:lnTo>
                 <a:lnTo>
                   <a:pt x="0" y="7250"/>
@@ -10082,8 +10044,8 @@
         </p:nvSpPr>
         <p:spPr>
           <a:xfrm>
-            <a:off x="8175625" y="2635250"/>
-            <a:ext cx="333375" cy="95250"/>
+            <a:off x="7921625" y="2238375"/>
+            <a:ext cx="198437" cy="95250"/>
           </a:xfrm>
           <a:custGeom>
             <a:avLst/>
@@ -10092,24 +10054,24 @@
             <a:cxnLst/>
             <a:rect l="l" t="t" r="r" b="b"/>
             <a:pathLst>
-              <a:path w="42000" h="12000">
+              <a:path w="25000" h="12000">
                 <a:moveTo>
                   <a:pt x="0" y="4750"/>
                 </a:moveTo>
                 <a:lnTo>
-                  <a:pt x="27000" y="4750"/>
+                  <a:pt x="10000" y="4750"/>
                 </a:lnTo>
                 <a:lnTo>
-                  <a:pt x="27000" y="0"/>
+                  <a:pt x="10000" y="0"/>
                 </a:lnTo>
                 <a:lnTo>
-                  <a:pt x="42000" y="6000"/>
+                  <a:pt x="25000" y="6000"/>
                 </a:lnTo>
                 <a:lnTo>
-                  <a:pt x="27000" y="12000"/>
+                  <a:pt x="10000" y="12000"/>
                 </a:lnTo>
                 <a:lnTo>
-                  <a:pt x="27000" y="7250"/>
+                  <a:pt x="10000" y="7250"/>
                 </a:lnTo>
                 <a:lnTo>
                   <a:pt x="0" y="7250"/>
@@ -10156,8 +10118,8 @@
         </p:nvSpPr>
         <p:spPr>
           <a:xfrm>
-            <a:off x="8175625" y="3683000"/>
-            <a:ext cx="333375" cy="95250"/>
+            <a:off x="7921625" y="3278187"/>
+            <a:ext cx="198437" cy="95250"/>
           </a:xfrm>
           <a:custGeom>
             <a:avLst/>
@@ -10166,24 +10128,24 @@
             <a:cxnLst/>
             <a:rect l="l" t="t" r="r" b="b"/>
             <a:pathLst>
-              <a:path w="42000" h="12000">
+              <a:path w="25000" h="12000">
                 <a:moveTo>
                   <a:pt x="0" y="4750"/>
                 </a:moveTo>
                 <a:lnTo>
-                  <a:pt x="27000" y="4750"/>
+                  <a:pt x="10000" y="4750"/>
                 </a:lnTo>
                 <a:lnTo>
-                  <a:pt x="27000" y="0"/>
+                  <a:pt x="10000" y="0"/>
                 </a:lnTo>
                 <a:lnTo>
-                  <a:pt x="42000" y="6000"/>
+                  <a:pt x="25000" y="6000"/>
                 </a:lnTo>
                 <a:lnTo>
-                  <a:pt x="27000" y="12000"/>
+                  <a:pt x="10000" y="12000"/>
                 </a:lnTo>
                 <a:lnTo>
-                  <a:pt x="27000" y="7250"/>
+                  <a:pt x="10000" y="7250"/>
                 </a:lnTo>
                 <a:lnTo>
                   <a:pt x="0" y="7250"/>
@@ -10230,8 +10192,8 @@
         </p:nvCxnSpPr>
         <p:spPr>
           <a:xfrm>
-            <a:off x="4397374" y="6000749"/>
-            <a:ext cx="4111625" cy="0"/>
+            <a:off x="4373562" y="5516562"/>
+            <a:ext cx="3738562" cy="0"/>
           </a:xfrm>
           <a:prstGeom prst="line">
             <a:avLst/>
@@ -10270,8 +10232,8 @@
         </p:nvSpPr>
         <p:spPr>
           <a:xfrm>
-            <a:off x="6159499" y="5841999"/>
-            <a:ext cx="587374" cy="317499"/>
+            <a:off x="5889624" y="5310187"/>
+            <a:ext cx="698499" cy="404812"/>
           </a:xfrm>
           <a:prstGeom prst="roundRect">
             <a:avLst>
@@ -10318,8 +10280,8 @@
         </p:nvSpPr>
         <p:spPr>
           <a:xfrm>
-            <a:off x="6238874" y="5873749"/>
-            <a:ext cx="428624" cy="253999"/>
+            <a:off x="5968999" y="5341937"/>
+            <a:ext cx="539749" cy="341312"/>
           </a:xfrm>
           <a:prstGeom prst="rect">
             <a:avLst/>
@@ -10335,7 +10297,7 @@
           <a:p>
             <a:pPr algn="ctr" fontAlgn="base">
               <a:lnSpc>
-                <a:spcPts val="1734"/>
+                <a:spcPts val="2359"/>
               </a:lnSpc>
               <a:spcBef>
                 <a:spcPts val="0"/>
@@ -10343,7 +10305,7 @@
               <a:spcAft>
                 <a:spcPts val="0"/>
               </a:spcAft>
-              <a:defRPr sz="1187" b="1" i="0" lang="zh-CN" dirty="0">
+              <a:defRPr sz="1624" b="0" i="0" lang="zh-CN" dirty="0">
                 <a:solidFill>
                   <a:srgbClr val="27303A"/>
                 </a:solidFill>
@@ -10353,7 +10315,7 @@
               </a:defRPr>
             </a:pPr>
             <a:r>
-              <a:rPr sz="1187" b="1" i="0" lang="zh-CN" dirty="0">
+              <a:rPr sz="1624" b="0" i="0" lang="zh-CN" dirty="0">
                 <a:solidFill>
                   <a:srgbClr val="27303A"/>
                 </a:solidFill>
